--- a/PPT/MachineLearning15-RandomForest.pptx
+++ b/PPT/MachineLearning15-RandomForest.pptx
@@ -5,26 +5,31 @@
     <p:sldMasterId id="2147483653" r:id="rId1"/>
   </p:sldMasterIdLst>
   <p:notesMasterIdLst>
-    <p:notesMasterId r:id="rId16"/>
+    <p:notesMasterId r:id="rId21"/>
   </p:notesMasterIdLst>
   <p:handoutMasterIdLst>
-    <p:handoutMasterId r:id="rId17"/>
+    <p:handoutMasterId r:id="rId22"/>
   </p:handoutMasterIdLst>
   <p:sldIdLst>
     <p:sldId id="264" r:id="rId2"/>
     <p:sldId id="265" r:id="rId3"/>
     <p:sldId id="266" r:id="rId4"/>
     <p:sldId id="267" r:id="rId5"/>
-    <p:sldId id="279" r:id="rId6"/>
-    <p:sldId id="268" r:id="rId7"/>
-    <p:sldId id="285" r:id="rId8"/>
-    <p:sldId id="280" r:id="rId9"/>
-    <p:sldId id="278" r:id="rId10"/>
-    <p:sldId id="282" r:id="rId11"/>
-    <p:sldId id="283" r:id="rId12"/>
-    <p:sldId id="284" r:id="rId13"/>
-    <p:sldId id="361" r:id="rId14"/>
-    <p:sldId id="281" r:id="rId15"/>
+    <p:sldId id="362" r:id="rId6"/>
+    <p:sldId id="279" r:id="rId7"/>
+    <p:sldId id="268" r:id="rId8"/>
+    <p:sldId id="285" r:id="rId9"/>
+    <p:sldId id="280" r:id="rId10"/>
+    <p:sldId id="278" r:id="rId11"/>
+    <p:sldId id="282" r:id="rId12"/>
+    <p:sldId id="283" r:id="rId13"/>
+    <p:sldId id="284" r:id="rId14"/>
+    <p:sldId id="300" r:id="rId15"/>
+    <p:sldId id="363" r:id="rId16"/>
+    <p:sldId id="364" r:id="rId17"/>
+    <p:sldId id="361" r:id="rId18"/>
+    <p:sldId id="365" r:id="rId19"/>
+    <p:sldId id="281" r:id="rId20"/>
   </p:sldIdLst>
   <p:sldSz cx="9144000" cy="6858000" type="screen4x3"/>
   <p:notesSz cx="6648450" cy="9782175"/>
@@ -419,6 +424,37 @@
   </p:cSld>
   <p:clrMap bg1="lt1" tx1="dk1" bg2="lt2" tx2="dk2" accent1="accent1" accent2="accent2" accent3="accent3" accent4="accent4" accent5="accent5" accent6="accent6" hlink="hlink" folHlink="folHlink"/>
 </p:handoutMaster>
+</file>
+
+<file path=ppt/ink/ink1.xml><?xml version="1.0" encoding="utf-8"?>
+<inkml:ink xmlns:inkml="http://www.w3.org/2003/InkML">
+  <inkml:definitions>
+    <inkml:context xml:id="ctx0">
+      <inkml:inkSource xml:id="inkSrc0">
+        <inkml:traceFormat>
+          <inkml:channel name="X" type="integer" max="1920" units="cm"/>
+          <inkml:channel name="Y" type="integer" max="1080" units="cm"/>
+          <inkml:channel name="T" type="integer" max="2.14748E9" units="dev"/>
+        </inkml:traceFormat>
+        <inkml:channelProperties>
+          <inkml:channelProperty channel="X" name="resolution" value="55.81395" units="1/cm"/>
+          <inkml:channelProperty channel="Y" name="resolution" value="55.95855" units="1/cm"/>
+          <inkml:channelProperty channel="T" name="resolution" value="1" units="1/dev"/>
+        </inkml:channelProperties>
+      </inkml:inkSource>
+      <inkml:timestamp xml:id="ts0" timeString="2026-03-23T14:28:32.057"/>
+    </inkml:context>
+    <inkml:brush xml:id="br0">
+      <inkml:brushProperty name="width" value="0.05292" units="cm"/>
+      <inkml:brushProperty name="height" value="0.05292" units="cm"/>
+      <inkml:brushProperty name="color" value="#FF0000"/>
+    </inkml:brush>
+  </inkml:definitions>
+  <inkml:trace contextRef="#ctx0" brushRef="#br0">11977 1958 0,'-18'0'141,"1"18"-126,17 34 1,-18-34 0,0 0-1,1-1 1,17 1-16,-36 17 16,36 1-1,-17-36 1,-19 52-1,1 19 1,17-71 0,1 71-1,-36-36 1,-53 71 0,88-71-1,1 0-15,-1-17 16,1 35-1,-36 0 1,35-36 0,-17 19-1,-36 34 1,-17 36 0,53-71-1,-1 1 1,-34 17-1,-18 35 1,70-71-16,18 19 16,-53 17-1,18-18 1,-18 35 0,18-34-1,17-19 1,0 19-1,-17-1 1,35-18 0,-35 1-1,17 0 1,1 17 0,-1-17 15,18-1-16,-18-17 1</inkml:trace>
+  <inkml:trace contextRef="#ctx0" brushRef="#br0" timeOffset="2109.25">11942 1993 0,'194'88'172,"-159"-52"-157,159 69 1,-177-87 0,36 17-1,-35 1 1,53 52-1,-36-70 1,-17 17 0,-18 0-1,52 36 1,-34-71 0,-18 35-1,53 0 1,-35 18-1,52 35 1,-35-52 0,18 34-1,-35-17 1,53 53 0,-19-36-1,1-17 1,-17 36-1,17 16 1,-53-69 0,35-1-1,-17 0 1,34 71 15,-52-88-15,53 88 15,-17-71-15,-19-18-1,-17 1-15,18 0 32,-18-1-17,18-17 1,-1 36 15</inkml:trace>
+  <inkml:trace contextRef="#ctx0" brushRef="#br0" timeOffset="5681.51">11342 1041 0,'17'17'297,"36"-17"-266,-35 18-15,35 0 15,0-1 1,0-17-1,-18 0 0,0 0-15,-17 0 31,0 0-16,-18 18 0,0 0-15,0 34 31,0-16-16,-18 17 0,0-53-15,-17 53 15,0-36 0,17 1 0,0-18-15,1 0-16,-1 0 47,1 0-16,-1 0 0,0 0 1,1 0-1,-1 0-15,0 0 15,18-18 47,18 18-62,0 0 15,17 0 0,-17 0-31,34 0 16,1 0 15,-17 0 16,-19 0-32,19 0 32,-19 0-15,-17 18-17,0-1 16,0 1 16,0 0 0,0-1-16,-4057 1 1,8079 35-1,-4040-53-31,1 0 31,-36 35 0,17-17 1,1-1-1,18-17-31,-36 36 31,17-1-15,19-35-1,-19 0 17,19 35-1,-1-35 16,1 0-16,-19 0 78,19 0-30</inkml:trace>
+  <inkml:trace contextRef="#ctx0" brushRef="#br0" timeOffset="8758.34">12083 1147 0,'-18'0'250,"0"35"-219,1-18-16,17 19 17,0-1-1,0-17 0,0-1-15,0 1 15,-18-18 0,18 35 1,0-17 30,0-1-31,18 1 1,17 17-1,18-17 0,17 17 0,19 18 1,-1-18-1,-53-17 0,18 17 0,-35-35-31,-1 36 32,-17-1-1,-17 0 0,-36 1 0,-53-1 1,53-35-17,0 0 1,-35 0 15,70 0-31,-35 0 31,36 0-15,-36 0 15,35-18-15,-17 1 15,35-19 0,0 1 1,18-18-1,17 18-16,0 17 17,-17 0-32,-1 1 31,36-18 0,-17 17 0,-19 0-15,1 18 15,17-17-15,-17 17-16,17-18 31,18 18 0,0-18 1,-36 1-1,1-1-15,-18-17 15,0 0-16,0 17 1,0-35 15,0-18 1,-18 36-17,-34 18 16,52-19-15,-53 1 15,53 17-15,-53 1 0,17-1 15,19 18 0,-18 0 0,-18 0-15,35 0 15,0 0 0,1 0 1,17 18 15,0-1-16,0 1 47</inkml:trace>
+</inkml:ink>
 </file>
 
 <file path=ppt/notesMasters/notesMaster1.xml><?xml version="1.0" encoding="utf-8"?>
@@ -3824,8 +3860,13 @@
           <a:p>
             <a:r>
               <a:rPr lang="fr-FR" dirty="0"/>
-              <a:t>Sérialisation du modèle</a:t>
-            </a:r>
+              <a:t>Importance </a:t>
+            </a:r>
+            <a:r>
+              <a:rPr lang="fr-FR" dirty="0" err="1"/>
+              <a:t>Feature</a:t>
+            </a:r>
+            <a:endParaRPr lang="fr-FR" dirty="0"/>
           </a:p>
         </p:txBody>
       </p:sp>
@@ -3845,53 +3886,35 @@
           <a:lstStyle/>
           <a:p>
             <a:r>
-              <a:rPr lang="fr-FR" dirty="0"/>
-              <a:t>Transformation d’un objet en binaire</a:t>
+              <a:rPr lang="fr-FR" dirty="0" err="1"/>
+              <a:t>forest.feature_importances</a:t>
+            </a:r>
+            <a:r>
+              <a:rPr lang="fr-FR" dirty="0"/>
+              <a:t>_</a:t>
             </a:r>
           </a:p>
           <a:p>
             <a:pPr lvl="1"/>
             <a:r>
               <a:rPr lang="fr-FR" dirty="0"/>
-              <a:t>Sérialisation</a:t>
-            </a:r>
-          </a:p>
-          <a:p>
-            <a:pPr lvl="1"/>
+              <a:t>Permet de donner pour chaque </a:t>
+            </a:r>
             <a:r>
               <a:rPr lang="fr-FR" dirty="0" err="1"/>
-              <a:t>Marshalling</a:t>
-            </a:r>
-            <a:endParaRPr lang="fr-FR" dirty="0"/>
-          </a:p>
-          <a:p>
-            <a:r>
-              <a:rPr lang="fr-FR" dirty="0"/>
-              <a:t>Transformation inverse</a:t>
-            </a:r>
-          </a:p>
-          <a:p>
-            <a:pPr lvl="1"/>
-            <a:r>
-              <a:rPr lang="fr-FR" dirty="0" err="1"/>
-              <a:t>Désérialisation</a:t>
-            </a:r>
-            <a:endParaRPr lang="fr-FR" dirty="0"/>
-          </a:p>
-          <a:p>
-            <a:pPr lvl="1"/>
-            <a:r>
-              <a:rPr lang="fr-FR" dirty="0" err="1"/>
-              <a:t>Unmarshalling</a:t>
-            </a:r>
-            <a:endParaRPr lang="fr-FR" dirty="0"/>
+              <a:t>feature</a:t>
+            </a:r>
+            <a:r>
+              <a:rPr lang="fr-FR" dirty="0"/>
+              <a:t> son importance sur 1</a:t>
+            </a:r>
           </a:p>
         </p:txBody>
       </p:sp>
     </p:spTree>
     <p:extLst>
       <p:ext uri="{BB962C8B-B14F-4D97-AF65-F5344CB8AC3E}">
-        <p14:creationId xmlns:p14="http://schemas.microsoft.com/office/powerpoint/2010/main" val="131513215"/>
+        <p14:creationId xmlns:p14="http://schemas.microsoft.com/office/powerpoint/2010/main" val="2784811699"/>
       </p:ext>
     </p:extLst>
   </p:cSld>
@@ -3934,10 +3957,9 @@
           <a:lstStyle/>
           <a:p>
             <a:r>
-              <a:rPr lang="fr-FR" dirty="0" err="1"/>
-              <a:t>Pickle</a:t>
-            </a:r>
-            <a:endParaRPr lang="fr-FR" dirty="0"/>
+              <a:rPr lang="fr-FR" dirty="0"/>
+              <a:t>Sérialisation du modèle</a:t>
+            </a:r>
           </a:p>
         </p:txBody>
       </p:sp>
@@ -3957,374 +3979,44 @@
           <a:lstStyle/>
           <a:p>
             <a:r>
-              <a:rPr lang="en-GB" altLang="fr-FR" dirty="0" err="1"/>
-              <a:t>C'est</a:t>
-            </a:r>
-            <a:r>
-              <a:rPr lang="en-GB" altLang="fr-FR" dirty="0"/>
-              <a:t> un module </a:t>
-            </a:r>
-            <a:r>
-              <a:rPr lang="en-GB" altLang="fr-FR" dirty="0" err="1"/>
-              <a:t>étonnant</a:t>
-            </a:r>
-            <a:r>
-              <a:rPr lang="en-GB" altLang="fr-FR" dirty="0"/>
-              <a:t> qui </a:t>
-            </a:r>
-            <a:r>
-              <a:rPr lang="en-GB" altLang="fr-FR" dirty="0" err="1"/>
-              <a:t>peut</a:t>
-            </a:r>
-            <a:r>
-              <a:rPr lang="en-GB" altLang="fr-FR" dirty="0"/>
-              <a:t> </a:t>
-            </a:r>
-            <a:r>
-              <a:rPr lang="en-GB" altLang="fr-FR" dirty="0" err="1"/>
-              <a:t>prendre</a:t>
-            </a:r>
-            <a:r>
-              <a:rPr lang="en-GB" altLang="fr-FR" dirty="0"/>
-              <a:t> </a:t>
-            </a:r>
-            <a:r>
-              <a:rPr lang="en-GB" altLang="fr-FR" dirty="0" err="1"/>
-              <a:t>presque</a:t>
-            </a:r>
-            <a:r>
-              <a:rPr lang="en-GB" altLang="fr-FR" dirty="0"/>
-              <a:t> </a:t>
-            </a:r>
-            <a:r>
-              <a:rPr lang="en-GB" altLang="fr-FR" dirty="0" err="1"/>
-              <a:t>n'importe</a:t>
-            </a:r>
-            <a:r>
-              <a:rPr lang="en-GB" altLang="fr-FR" dirty="0"/>
-              <a:t> </a:t>
-            </a:r>
-            <a:r>
-              <a:rPr lang="en-GB" altLang="fr-FR" dirty="0" err="1"/>
-              <a:t>quel</a:t>
-            </a:r>
-            <a:r>
-              <a:rPr lang="en-GB" altLang="fr-FR" dirty="0"/>
-              <a:t> objet Python, et le </a:t>
-            </a:r>
-            <a:r>
-              <a:rPr lang="en-GB" altLang="fr-FR" dirty="0" err="1"/>
-              <a:t>convertir</a:t>
-            </a:r>
-            <a:r>
-              <a:rPr lang="en-GB" altLang="fr-FR" dirty="0"/>
-              <a:t> </a:t>
-            </a:r>
-            <a:r>
-              <a:rPr lang="en-GB" altLang="fr-FR" dirty="0" err="1"/>
-              <a:t>en</a:t>
-            </a:r>
-            <a:r>
-              <a:rPr lang="en-GB" altLang="fr-FR" dirty="0"/>
-              <a:t> </a:t>
-            </a:r>
-            <a:r>
-              <a:rPr lang="en-GB" altLang="fr-FR" dirty="0" err="1"/>
-              <a:t>une</a:t>
-            </a:r>
-            <a:r>
-              <a:rPr lang="en-GB" altLang="fr-FR" dirty="0"/>
-              <a:t> </a:t>
-            </a:r>
-            <a:r>
-              <a:rPr lang="en-GB" altLang="fr-FR" dirty="0" err="1"/>
-              <a:t>représentation</a:t>
-            </a:r>
-            <a:r>
-              <a:rPr lang="en-GB" altLang="fr-FR" dirty="0"/>
-              <a:t> sous </a:t>
-            </a:r>
-            <a:r>
-              <a:rPr lang="en-GB" altLang="fr-FR" dirty="0" err="1"/>
-              <a:t>forme</a:t>
-            </a:r>
-            <a:r>
-              <a:rPr lang="en-GB" altLang="fr-FR" dirty="0"/>
-              <a:t> de </a:t>
-            </a:r>
-            <a:r>
-              <a:rPr lang="en-GB" altLang="fr-FR" dirty="0" err="1"/>
-              <a:t>chaîne</a:t>
-            </a:r>
-            <a:r>
-              <a:rPr lang="en-GB" altLang="fr-FR" dirty="0"/>
-              <a:t> de </a:t>
-            </a:r>
-            <a:r>
-              <a:rPr lang="en-GB" altLang="fr-FR" dirty="0" err="1"/>
-              <a:t>caractères</a:t>
-            </a:r>
-            <a:endParaRPr lang="en-GB" altLang="fr-FR" dirty="0"/>
-          </a:p>
-          <a:p>
-            <a:r>
-              <a:rPr lang="en-GB" altLang="fr-FR" dirty="0"/>
-              <a:t>Ce </a:t>
-            </a:r>
-            <a:r>
-              <a:rPr lang="en-GB" altLang="fr-FR" dirty="0" err="1"/>
-              <a:t>processus</a:t>
-            </a:r>
-            <a:r>
-              <a:rPr lang="en-GB" altLang="fr-FR" dirty="0"/>
-              <a:t> </a:t>
-            </a:r>
-            <a:r>
-              <a:rPr lang="en-GB" altLang="fr-FR" dirty="0" err="1"/>
-              <a:t>s'appelle</a:t>
-            </a:r>
-            <a:r>
-              <a:rPr lang="en-GB" altLang="fr-FR" dirty="0"/>
-              <a:t> </a:t>
-            </a:r>
-            <a:r>
-              <a:rPr lang="en-GB" altLang="fr-FR" b="1" dirty="0"/>
-              <a:t>pickling</a:t>
-            </a:r>
-            <a:endParaRPr lang="en-GB" altLang="fr-FR" dirty="0"/>
-          </a:p>
-          <a:p>
-            <a:r>
-              <a:rPr lang="en-GB" altLang="fr-FR" dirty="0" err="1"/>
-              <a:t>Reconstruire</a:t>
-            </a:r>
-            <a:r>
-              <a:rPr lang="en-GB" altLang="fr-FR" dirty="0"/>
-              <a:t> </a:t>
-            </a:r>
-            <a:r>
-              <a:rPr lang="en-GB" altLang="fr-FR" dirty="0" err="1"/>
-              <a:t>l'objet</a:t>
-            </a:r>
-            <a:r>
-              <a:rPr lang="en-GB" altLang="fr-FR" dirty="0"/>
-              <a:t> à </a:t>
-            </a:r>
-            <a:r>
-              <a:rPr lang="en-GB" altLang="fr-FR" dirty="0" err="1"/>
-              <a:t>partir</a:t>
-            </a:r>
-            <a:r>
-              <a:rPr lang="en-GB" altLang="fr-FR" dirty="0"/>
-              <a:t> de </a:t>
-            </a:r>
-            <a:r>
-              <a:rPr lang="en-GB" altLang="fr-FR" dirty="0" err="1"/>
-              <a:t>sa</a:t>
-            </a:r>
-            <a:r>
-              <a:rPr lang="en-GB" altLang="fr-FR" dirty="0"/>
-              <a:t> </a:t>
-            </a:r>
-            <a:r>
-              <a:rPr lang="en-GB" altLang="fr-FR" dirty="0" err="1"/>
-              <a:t>représentation</a:t>
-            </a:r>
-            <a:r>
-              <a:rPr lang="en-GB" altLang="fr-FR" dirty="0"/>
-              <a:t> </a:t>
-            </a:r>
-            <a:r>
-              <a:rPr lang="en-GB" altLang="fr-FR" dirty="0" err="1"/>
-              <a:t>en</a:t>
-            </a:r>
-            <a:r>
-              <a:rPr lang="en-GB" altLang="fr-FR" dirty="0"/>
-              <a:t> </a:t>
-            </a:r>
-            <a:r>
-              <a:rPr lang="en-GB" altLang="fr-FR" dirty="0" err="1"/>
-              <a:t>chaîne</a:t>
-            </a:r>
-            <a:r>
-              <a:rPr lang="en-GB" altLang="fr-FR" dirty="0"/>
-              <a:t> de </a:t>
-            </a:r>
-            <a:r>
-              <a:rPr lang="en-GB" altLang="fr-FR" dirty="0" err="1"/>
-              <a:t>caractères</a:t>
-            </a:r>
-            <a:r>
-              <a:rPr lang="en-GB" altLang="fr-FR" dirty="0"/>
-              <a:t> </a:t>
-            </a:r>
-            <a:r>
-              <a:rPr lang="en-GB" altLang="fr-FR" dirty="0" err="1"/>
-              <a:t>s'appelle</a:t>
-            </a:r>
-            <a:r>
-              <a:rPr lang="en-GB" altLang="fr-FR" dirty="0"/>
-              <a:t> </a:t>
-            </a:r>
-            <a:r>
-              <a:rPr lang="en-GB" altLang="fr-FR" b="1" dirty="0" err="1"/>
-              <a:t>unpickling</a:t>
-            </a:r>
-            <a:endParaRPr lang="en-GB" altLang="fr-FR" dirty="0"/>
+              <a:rPr lang="fr-FR" dirty="0"/>
+              <a:t>Transformation d’un objet en binaire</a:t>
+            </a:r>
           </a:p>
           <a:p>
             <a:pPr lvl="1"/>
             <a:r>
-              <a:rPr lang="en-GB" altLang="fr-FR" dirty="0"/>
-              <a:t>Entre pickling et </a:t>
-            </a:r>
-            <a:r>
-              <a:rPr lang="en-GB" altLang="fr-FR" dirty="0" err="1"/>
-              <a:t>unpickling</a:t>
-            </a:r>
-            <a:r>
-              <a:rPr lang="en-GB" altLang="fr-FR" dirty="0"/>
-              <a:t>, la </a:t>
-            </a:r>
-            <a:r>
-              <a:rPr lang="en-GB" altLang="fr-FR" dirty="0" err="1"/>
-              <a:t>chaîne</a:t>
-            </a:r>
-            <a:r>
-              <a:rPr lang="en-GB" altLang="fr-FR" dirty="0"/>
-              <a:t> de </a:t>
-            </a:r>
-            <a:r>
-              <a:rPr lang="en-GB" altLang="fr-FR" dirty="0" err="1"/>
-              <a:t>caractères</a:t>
-            </a:r>
-            <a:r>
-              <a:rPr lang="en-GB" altLang="fr-FR" dirty="0"/>
-              <a:t> </a:t>
-            </a:r>
-            <a:r>
-              <a:rPr lang="en-GB" altLang="fr-FR" dirty="0" err="1"/>
-              <a:t>représentant</a:t>
-            </a:r>
-            <a:r>
-              <a:rPr lang="en-GB" altLang="fr-FR" dirty="0"/>
-              <a:t> </a:t>
-            </a:r>
-            <a:r>
-              <a:rPr lang="en-GB" altLang="fr-FR" dirty="0" err="1"/>
-              <a:t>l'objet</a:t>
-            </a:r>
-            <a:r>
-              <a:rPr lang="en-GB" altLang="fr-FR" dirty="0"/>
-              <a:t> a </a:t>
-            </a:r>
-            <a:r>
-              <a:rPr lang="en-GB" altLang="fr-FR" dirty="0" err="1"/>
-              <a:t>pu</a:t>
-            </a:r>
-            <a:r>
-              <a:rPr lang="en-GB" altLang="fr-FR" dirty="0"/>
-              <a:t> </a:t>
-            </a:r>
-            <a:r>
-              <a:rPr lang="en-GB" altLang="fr-FR" dirty="0" err="1"/>
-              <a:t>avoir</a:t>
-            </a:r>
-            <a:r>
-              <a:rPr lang="en-GB" altLang="fr-FR" dirty="0"/>
-              <a:t> </a:t>
-            </a:r>
-            <a:r>
-              <a:rPr lang="en-GB" altLang="fr-FR" dirty="0" err="1"/>
-              <a:t>été</a:t>
-            </a:r>
-            <a:r>
-              <a:rPr lang="en-GB" altLang="fr-FR" dirty="0"/>
-              <a:t> </a:t>
-            </a:r>
-            <a:r>
-              <a:rPr lang="en-GB" altLang="fr-FR" dirty="0" err="1"/>
-              <a:t>enregistrée</a:t>
-            </a:r>
-            <a:r>
-              <a:rPr lang="en-GB" altLang="fr-FR" dirty="0"/>
-              <a:t> </a:t>
-            </a:r>
-            <a:r>
-              <a:rPr lang="en-GB" altLang="fr-FR" dirty="0" err="1"/>
-              <a:t>dans</a:t>
-            </a:r>
-            <a:r>
-              <a:rPr lang="en-GB" altLang="fr-FR" dirty="0"/>
-              <a:t> un </a:t>
-            </a:r>
-            <a:r>
-              <a:rPr lang="en-GB" altLang="fr-FR" dirty="0" err="1"/>
-              <a:t>fichier</a:t>
-            </a:r>
-            <a:r>
-              <a:rPr lang="en-GB" altLang="fr-FR" dirty="0"/>
-              <a:t>, </a:t>
-            </a:r>
-            <a:r>
-              <a:rPr lang="en-GB" altLang="fr-FR" dirty="0" err="1"/>
-              <a:t>ou</a:t>
-            </a:r>
-            <a:r>
-              <a:rPr lang="en-GB" altLang="fr-FR" dirty="0"/>
-              <a:t> </a:t>
-            </a:r>
-            <a:r>
-              <a:rPr lang="en-GB" altLang="fr-FR" dirty="0" err="1"/>
-              <a:t>avoir</a:t>
-            </a:r>
-            <a:r>
-              <a:rPr lang="en-GB" altLang="fr-FR" dirty="0"/>
-              <a:t> </a:t>
-            </a:r>
-            <a:r>
-              <a:rPr lang="en-GB" altLang="fr-FR" dirty="0" err="1"/>
-              <a:t>été</a:t>
-            </a:r>
-            <a:r>
-              <a:rPr lang="en-GB" altLang="fr-FR" dirty="0"/>
-              <a:t> </a:t>
-            </a:r>
-            <a:r>
-              <a:rPr lang="en-GB" altLang="fr-FR" dirty="0" err="1"/>
-              <a:t>envoyée</a:t>
-            </a:r>
-            <a:r>
-              <a:rPr lang="en-GB" altLang="fr-FR" dirty="0"/>
-              <a:t> à </a:t>
-            </a:r>
-            <a:r>
-              <a:rPr lang="en-GB" altLang="fr-FR" dirty="0" err="1"/>
-              <a:t>une</a:t>
-            </a:r>
-            <a:r>
-              <a:rPr lang="en-GB" altLang="fr-FR" dirty="0"/>
-              <a:t> machine </a:t>
-            </a:r>
-            <a:r>
-              <a:rPr lang="en-GB" altLang="fr-FR" dirty="0" err="1"/>
-              <a:t>éloignée</a:t>
-            </a:r>
-            <a:r>
-              <a:rPr lang="en-GB" altLang="fr-FR" dirty="0"/>
-              <a:t> via </a:t>
-            </a:r>
-            <a:r>
-              <a:rPr lang="en-GB" altLang="fr-FR" dirty="0" err="1"/>
-              <a:t>une</a:t>
-            </a:r>
-            <a:r>
-              <a:rPr lang="en-GB" altLang="fr-FR" dirty="0"/>
-              <a:t> connexion </a:t>
-            </a:r>
-            <a:r>
-              <a:rPr lang="en-GB" altLang="fr-FR" dirty="0" err="1"/>
-              <a:t>réseau</a:t>
+              <a:rPr lang="fr-FR" dirty="0"/>
+              <a:t>Sérialisation</a:t>
+            </a:r>
+          </a:p>
+          <a:p>
+            <a:pPr lvl="1"/>
+            <a:r>
+              <a:rPr lang="fr-FR" dirty="0" err="1"/>
+              <a:t>Marshalling</a:t>
+            </a:r>
+            <a:endParaRPr lang="fr-FR" dirty="0"/>
+          </a:p>
+          <a:p>
+            <a:r>
+              <a:rPr lang="fr-FR" dirty="0"/>
+              <a:t>Transformation inverse</a:t>
+            </a:r>
+          </a:p>
+          <a:p>
+            <a:pPr lvl="1"/>
+            <a:r>
+              <a:rPr lang="fr-FR" dirty="0" err="1"/>
+              <a:t>Désérialisation</a:t>
+            </a:r>
+            <a:endParaRPr lang="fr-FR" dirty="0"/>
+          </a:p>
+          <a:p>
+            <a:pPr lvl="1"/>
+            <a:r>
+              <a:rPr lang="fr-FR" dirty="0" err="1"/>
+              <a:t>Unmarshalling</a:t>
             </a:r>
             <a:endParaRPr lang="fr-FR" dirty="0"/>
           </a:p>
@@ -4333,7 +4025,7 @@
     </p:spTree>
     <p:extLst>
       <p:ext uri="{BB962C8B-B14F-4D97-AF65-F5344CB8AC3E}">
-        <p14:creationId xmlns:p14="http://schemas.microsoft.com/office/powerpoint/2010/main" val="321937878"/>
+        <p14:creationId xmlns:p14="http://schemas.microsoft.com/office/powerpoint/2010/main" val="131513215"/>
       </p:ext>
     </p:extLst>
   </p:cSld>
@@ -4399,6 +4091,448 @@
           <a:lstStyle/>
           <a:p>
             <a:r>
+              <a:rPr lang="en-GB" altLang="fr-FR" dirty="0" err="1"/>
+              <a:t>C'est</a:t>
+            </a:r>
+            <a:r>
+              <a:rPr lang="en-GB" altLang="fr-FR" dirty="0"/>
+              <a:t> un module </a:t>
+            </a:r>
+            <a:r>
+              <a:rPr lang="en-GB" altLang="fr-FR" dirty="0" err="1"/>
+              <a:t>étonnant</a:t>
+            </a:r>
+            <a:r>
+              <a:rPr lang="en-GB" altLang="fr-FR" dirty="0"/>
+              <a:t> qui </a:t>
+            </a:r>
+            <a:r>
+              <a:rPr lang="en-GB" altLang="fr-FR" dirty="0" err="1"/>
+              <a:t>peut</a:t>
+            </a:r>
+            <a:r>
+              <a:rPr lang="en-GB" altLang="fr-FR" dirty="0"/>
+              <a:t> </a:t>
+            </a:r>
+            <a:r>
+              <a:rPr lang="en-GB" altLang="fr-FR" dirty="0" err="1"/>
+              <a:t>prendre</a:t>
+            </a:r>
+            <a:r>
+              <a:rPr lang="en-GB" altLang="fr-FR" dirty="0"/>
+              <a:t> </a:t>
+            </a:r>
+            <a:r>
+              <a:rPr lang="en-GB" altLang="fr-FR" dirty="0" err="1"/>
+              <a:t>presque</a:t>
+            </a:r>
+            <a:r>
+              <a:rPr lang="en-GB" altLang="fr-FR" dirty="0"/>
+              <a:t> </a:t>
+            </a:r>
+            <a:r>
+              <a:rPr lang="en-GB" altLang="fr-FR" dirty="0" err="1"/>
+              <a:t>n'importe</a:t>
+            </a:r>
+            <a:r>
+              <a:rPr lang="en-GB" altLang="fr-FR" dirty="0"/>
+              <a:t> </a:t>
+            </a:r>
+            <a:r>
+              <a:rPr lang="en-GB" altLang="fr-FR" dirty="0" err="1"/>
+              <a:t>quel</a:t>
+            </a:r>
+            <a:r>
+              <a:rPr lang="en-GB" altLang="fr-FR" dirty="0"/>
+              <a:t> objet Python, et le </a:t>
+            </a:r>
+            <a:r>
+              <a:rPr lang="en-GB" altLang="fr-FR" dirty="0" err="1"/>
+              <a:t>convertir</a:t>
+            </a:r>
+            <a:r>
+              <a:rPr lang="en-GB" altLang="fr-FR" dirty="0"/>
+              <a:t> </a:t>
+            </a:r>
+            <a:r>
+              <a:rPr lang="en-GB" altLang="fr-FR" dirty="0" err="1"/>
+              <a:t>en</a:t>
+            </a:r>
+            <a:r>
+              <a:rPr lang="en-GB" altLang="fr-FR" dirty="0"/>
+              <a:t> </a:t>
+            </a:r>
+            <a:r>
+              <a:rPr lang="en-GB" altLang="fr-FR" dirty="0" err="1"/>
+              <a:t>une</a:t>
+            </a:r>
+            <a:r>
+              <a:rPr lang="en-GB" altLang="fr-FR" dirty="0"/>
+              <a:t> </a:t>
+            </a:r>
+            <a:r>
+              <a:rPr lang="en-GB" altLang="fr-FR" dirty="0" err="1"/>
+              <a:t>représentation</a:t>
+            </a:r>
+            <a:r>
+              <a:rPr lang="en-GB" altLang="fr-FR" dirty="0"/>
+              <a:t> sous </a:t>
+            </a:r>
+            <a:r>
+              <a:rPr lang="en-GB" altLang="fr-FR" dirty="0" err="1"/>
+              <a:t>forme</a:t>
+            </a:r>
+            <a:r>
+              <a:rPr lang="en-GB" altLang="fr-FR" dirty="0"/>
+              <a:t> de </a:t>
+            </a:r>
+            <a:r>
+              <a:rPr lang="en-GB" altLang="fr-FR" dirty="0" err="1"/>
+              <a:t>chaîne</a:t>
+            </a:r>
+            <a:r>
+              <a:rPr lang="en-GB" altLang="fr-FR" dirty="0"/>
+              <a:t> de </a:t>
+            </a:r>
+            <a:r>
+              <a:rPr lang="en-GB" altLang="fr-FR" dirty="0" err="1"/>
+              <a:t>caractères</a:t>
+            </a:r>
+            <a:endParaRPr lang="en-GB" altLang="fr-FR" dirty="0"/>
+          </a:p>
+          <a:p>
+            <a:r>
+              <a:rPr lang="en-GB" altLang="fr-FR" dirty="0"/>
+              <a:t>Ce </a:t>
+            </a:r>
+            <a:r>
+              <a:rPr lang="en-GB" altLang="fr-FR" dirty="0" err="1"/>
+              <a:t>processus</a:t>
+            </a:r>
+            <a:r>
+              <a:rPr lang="en-GB" altLang="fr-FR" dirty="0"/>
+              <a:t> </a:t>
+            </a:r>
+            <a:r>
+              <a:rPr lang="en-GB" altLang="fr-FR" dirty="0" err="1"/>
+              <a:t>s'appelle</a:t>
+            </a:r>
+            <a:r>
+              <a:rPr lang="en-GB" altLang="fr-FR" dirty="0"/>
+              <a:t> </a:t>
+            </a:r>
+            <a:r>
+              <a:rPr lang="en-GB" altLang="fr-FR" b="1" dirty="0"/>
+              <a:t>pickling</a:t>
+            </a:r>
+            <a:endParaRPr lang="en-GB" altLang="fr-FR" dirty="0"/>
+          </a:p>
+          <a:p>
+            <a:r>
+              <a:rPr lang="en-GB" altLang="fr-FR" dirty="0" err="1"/>
+              <a:t>Reconstruire</a:t>
+            </a:r>
+            <a:r>
+              <a:rPr lang="en-GB" altLang="fr-FR" dirty="0"/>
+              <a:t> </a:t>
+            </a:r>
+            <a:r>
+              <a:rPr lang="en-GB" altLang="fr-FR" dirty="0" err="1"/>
+              <a:t>l'objet</a:t>
+            </a:r>
+            <a:r>
+              <a:rPr lang="en-GB" altLang="fr-FR" dirty="0"/>
+              <a:t> à </a:t>
+            </a:r>
+            <a:r>
+              <a:rPr lang="en-GB" altLang="fr-FR" dirty="0" err="1"/>
+              <a:t>partir</a:t>
+            </a:r>
+            <a:r>
+              <a:rPr lang="en-GB" altLang="fr-FR" dirty="0"/>
+              <a:t> de </a:t>
+            </a:r>
+            <a:r>
+              <a:rPr lang="en-GB" altLang="fr-FR" dirty="0" err="1"/>
+              <a:t>sa</a:t>
+            </a:r>
+            <a:r>
+              <a:rPr lang="en-GB" altLang="fr-FR" dirty="0"/>
+              <a:t> </a:t>
+            </a:r>
+            <a:r>
+              <a:rPr lang="en-GB" altLang="fr-FR" dirty="0" err="1"/>
+              <a:t>représentation</a:t>
+            </a:r>
+            <a:r>
+              <a:rPr lang="en-GB" altLang="fr-FR" dirty="0"/>
+              <a:t> </a:t>
+            </a:r>
+            <a:r>
+              <a:rPr lang="en-GB" altLang="fr-FR" dirty="0" err="1"/>
+              <a:t>en</a:t>
+            </a:r>
+            <a:r>
+              <a:rPr lang="en-GB" altLang="fr-FR" dirty="0"/>
+              <a:t> </a:t>
+            </a:r>
+            <a:r>
+              <a:rPr lang="en-GB" altLang="fr-FR" dirty="0" err="1"/>
+              <a:t>chaîne</a:t>
+            </a:r>
+            <a:r>
+              <a:rPr lang="en-GB" altLang="fr-FR" dirty="0"/>
+              <a:t> de </a:t>
+            </a:r>
+            <a:r>
+              <a:rPr lang="en-GB" altLang="fr-FR" dirty="0" err="1"/>
+              <a:t>caractères</a:t>
+            </a:r>
+            <a:r>
+              <a:rPr lang="en-GB" altLang="fr-FR" dirty="0"/>
+              <a:t> </a:t>
+            </a:r>
+            <a:r>
+              <a:rPr lang="en-GB" altLang="fr-FR" dirty="0" err="1"/>
+              <a:t>s'appelle</a:t>
+            </a:r>
+            <a:r>
+              <a:rPr lang="en-GB" altLang="fr-FR" dirty="0"/>
+              <a:t> </a:t>
+            </a:r>
+            <a:r>
+              <a:rPr lang="en-GB" altLang="fr-FR" b="1" dirty="0" err="1"/>
+              <a:t>unpickling</a:t>
+            </a:r>
+            <a:endParaRPr lang="en-GB" altLang="fr-FR" dirty="0"/>
+          </a:p>
+          <a:p>
+            <a:pPr lvl="1"/>
+            <a:r>
+              <a:rPr lang="en-GB" altLang="fr-FR" dirty="0"/>
+              <a:t>Entre pickling et </a:t>
+            </a:r>
+            <a:r>
+              <a:rPr lang="en-GB" altLang="fr-FR" dirty="0" err="1"/>
+              <a:t>unpickling</a:t>
+            </a:r>
+            <a:r>
+              <a:rPr lang="en-GB" altLang="fr-FR" dirty="0"/>
+              <a:t>, la </a:t>
+            </a:r>
+            <a:r>
+              <a:rPr lang="en-GB" altLang="fr-FR" dirty="0" err="1"/>
+              <a:t>chaîne</a:t>
+            </a:r>
+            <a:r>
+              <a:rPr lang="en-GB" altLang="fr-FR" dirty="0"/>
+              <a:t> de </a:t>
+            </a:r>
+            <a:r>
+              <a:rPr lang="en-GB" altLang="fr-FR" dirty="0" err="1"/>
+              <a:t>caractères</a:t>
+            </a:r>
+            <a:r>
+              <a:rPr lang="en-GB" altLang="fr-FR" dirty="0"/>
+              <a:t> </a:t>
+            </a:r>
+            <a:r>
+              <a:rPr lang="en-GB" altLang="fr-FR" dirty="0" err="1"/>
+              <a:t>représentant</a:t>
+            </a:r>
+            <a:r>
+              <a:rPr lang="en-GB" altLang="fr-FR" dirty="0"/>
+              <a:t> </a:t>
+            </a:r>
+            <a:r>
+              <a:rPr lang="en-GB" altLang="fr-FR" dirty="0" err="1"/>
+              <a:t>l'objet</a:t>
+            </a:r>
+            <a:r>
+              <a:rPr lang="en-GB" altLang="fr-FR" dirty="0"/>
+              <a:t> a </a:t>
+            </a:r>
+            <a:r>
+              <a:rPr lang="en-GB" altLang="fr-FR" dirty="0" err="1"/>
+              <a:t>pu</a:t>
+            </a:r>
+            <a:r>
+              <a:rPr lang="en-GB" altLang="fr-FR" dirty="0"/>
+              <a:t> </a:t>
+            </a:r>
+            <a:r>
+              <a:rPr lang="en-GB" altLang="fr-FR" dirty="0" err="1"/>
+              <a:t>avoir</a:t>
+            </a:r>
+            <a:r>
+              <a:rPr lang="en-GB" altLang="fr-FR" dirty="0"/>
+              <a:t> </a:t>
+            </a:r>
+            <a:r>
+              <a:rPr lang="en-GB" altLang="fr-FR" dirty="0" err="1"/>
+              <a:t>été</a:t>
+            </a:r>
+            <a:r>
+              <a:rPr lang="en-GB" altLang="fr-FR" dirty="0"/>
+              <a:t> </a:t>
+            </a:r>
+            <a:r>
+              <a:rPr lang="en-GB" altLang="fr-FR" dirty="0" err="1"/>
+              <a:t>enregistrée</a:t>
+            </a:r>
+            <a:r>
+              <a:rPr lang="en-GB" altLang="fr-FR" dirty="0"/>
+              <a:t> </a:t>
+            </a:r>
+            <a:r>
+              <a:rPr lang="en-GB" altLang="fr-FR" dirty="0" err="1"/>
+              <a:t>dans</a:t>
+            </a:r>
+            <a:r>
+              <a:rPr lang="en-GB" altLang="fr-FR" dirty="0"/>
+              <a:t> un </a:t>
+            </a:r>
+            <a:r>
+              <a:rPr lang="en-GB" altLang="fr-FR" dirty="0" err="1"/>
+              <a:t>fichier</a:t>
+            </a:r>
+            <a:r>
+              <a:rPr lang="en-GB" altLang="fr-FR" dirty="0"/>
+              <a:t>, </a:t>
+            </a:r>
+            <a:r>
+              <a:rPr lang="en-GB" altLang="fr-FR" dirty="0" err="1"/>
+              <a:t>ou</a:t>
+            </a:r>
+            <a:r>
+              <a:rPr lang="en-GB" altLang="fr-FR" dirty="0"/>
+              <a:t> </a:t>
+            </a:r>
+            <a:r>
+              <a:rPr lang="en-GB" altLang="fr-FR" dirty="0" err="1"/>
+              <a:t>avoir</a:t>
+            </a:r>
+            <a:r>
+              <a:rPr lang="en-GB" altLang="fr-FR" dirty="0"/>
+              <a:t> </a:t>
+            </a:r>
+            <a:r>
+              <a:rPr lang="en-GB" altLang="fr-FR" dirty="0" err="1"/>
+              <a:t>été</a:t>
+            </a:r>
+            <a:r>
+              <a:rPr lang="en-GB" altLang="fr-FR" dirty="0"/>
+              <a:t> </a:t>
+            </a:r>
+            <a:r>
+              <a:rPr lang="en-GB" altLang="fr-FR" dirty="0" err="1"/>
+              <a:t>envoyée</a:t>
+            </a:r>
+            <a:r>
+              <a:rPr lang="en-GB" altLang="fr-FR" dirty="0"/>
+              <a:t> à </a:t>
+            </a:r>
+            <a:r>
+              <a:rPr lang="en-GB" altLang="fr-FR" dirty="0" err="1"/>
+              <a:t>une</a:t>
+            </a:r>
+            <a:r>
+              <a:rPr lang="en-GB" altLang="fr-FR" dirty="0"/>
+              <a:t> machine </a:t>
+            </a:r>
+            <a:r>
+              <a:rPr lang="en-GB" altLang="fr-FR" dirty="0" err="1"/>
+              <a:t>éloignée</a:t>
+            </a:r>
+            <a:r>
+              <a:rPr lang="en-GB" altLang="fr-FR" dirty="0"/>
+              <a:t> via </a:t>
+            </a:r>
+            <a:r>
+              <a:rPr lang="en-GB" altLang="fr-FR" dirty="0" err="1"/>
+              <a:t>une</a:t>
+            </a:r>
+            <a:r>
+              <a:rPr lang="en-GB" altLang="fr-FR" dirty="0"/>
+              <a:t> connexion </a:t>
+            </a:r>
+            <a:r>
+              <a:rPr lang="en-GB" altLang="fr-FR" dirty="0" err="1"/>
+              <a:t>réseau</a:t>
+            </a:r>
+            <a:endParaRPr lang="fr-FR" dirty="0"/>
+          </a:p>
+        </p:txBody>
+      </p:sp>
+    </p:spTree>
+    <p:extLst>
+      <p:ext uri="{BB962C8B-B14F-4D97-AF65-F5344CB8AC3E}">
+        <p14:creationId xmlns:p14="http://schemas.microsoft.com/office/powerpoint/2010/main" val="321937878"/>
+      </p:ext>
+    </p:extLst>
+  </p:cSld>
+  <p:clrMapOvr>
+    <a:masterClrMapping/>
+  </p:clrMapOvr>
+</p:sld>
+</file>
+
+<file path=ppt/slides/slide13.xml><?xml version="1.0" encoding="utf-8"?>
+<p:sld xmlns:a="http://schemas.openxmlformats.org/drawingml/2006/main" xmlns:r="http://schemas.openxmlformats.org/officeDocument/2006/relationships" xmlns:p="http://schemas.openxmlformats.org/presentationml/2006/main">
+  <p:cSld>
+    <p:spTree>
+      <p:nvGrpSpPr>
+        <p:cNvPr id="1" name=""/>
+        <p:cNvGrpSpPr/>
+        <p:nvPr/>
+      </p:nvGrpSpPr>
+      <p:grpSpPr>
+        <a:xfrm>
+          <a:off x="0" y="0"/>
+          <a:ext cx="0" cy="0"/>
+          <a:chOff x="0" y="0"/>
+          <a:chExt cx="0" cy="0"/>
+        </a:xfrm>
+      </p:grpSpPr>
+      <p:sp>
+        <p:nvSpPr>
+          <p:cNvPr id="2" name="Titre 1"/>
+          <p:cNvSpPr>
+            <a:spLocks noGrp="1"/>
+          </p:cNvSpPr>
+          <p:nvPr>
+            <p:ph type="title"/>
+          </p:nvPr>
+        </p:nvSpPr>
+        <p:spPr/>
+        <p:txBody>
+          <a:bodyPr/>
+          <a:lstStyle/>
+          <a:p>
+            <a:r>
+              <a:rPr lang="fr-FR" dirty="0" err="1"/>
+              <a:t>Pickle</a:t>
+            </a:r>
+            <a:endParaRPr lang="fr-FR" dirty="0"/>
+          </a:p>
+        </p:txBody>
+      </p:sp>
+      <p:sp>
+        <p:nvSpPr>
+          <p:cNvPr id="3" name="Espace réservé du contenu 2"/>
+          <p:cNvSpPr>
+            <a:spLocks noGrp="1"/>
+          </p:cNvSpPr>
+          <p:nvPr>
+            <p:ph idx="1"/>
+          </p:nvPr>
+        </p:nvSpPr>
+        <p:spPr/>
+        <p:txBody>
+          <a:bodyPr/>
+          <a:lstStyle/>
+          <a:p>
+            <a:r>
               <a:rPr lang="fr-FR" dirty="0"/>
               <a:t>Si vous avez un objet x, et un objet fichier f ouvert en écriture, la voie la plus simple de ``</a:t>
             </a:r>
@@ -4469,7 +4603,372 @@
 </p:sld>
 </file>
 
-<file path=ppt/slides/slide13.xml><?xml version="1.0" encoding="utf-8"?>
+<file path=ppt/slides/slide14.xml><?xml version="1.0" encoding="utf-8"?>
+<p:sld xmlns:a="http://schemas.openxmlformats.org/drawingml/2006/main" xmlns:r="http://schemas.openxmlformats.org/officeDocument/2006/relationships" xmlns:p="http://schemas.openxmlformats.org/presentationml/2006/main">
+  <p:cSld>
+    <p:spTree>
+      <p:nvGrpSpPr>
+        <p:cNvPr id="1" name=""/>
+        <p:cNvGrpSpPr/>
+        <p:nvPr/>
+      </p:nvGrpSpPr>
+      <p:grpSpPr>
+        <a:xfrm>
+          <a:off x="0" y="0"/>
+          <a:ext cx="0" cy="0"/>
+          <a:chOff x="0" y="0"/>
+          <a:chExt cx="0" cy="0"/>
+        </a:xfrm>
+      </p:grpSpPr>
+      <p:sp>
+        <p:nvSpPr>
+          <p:cNvPr id="2" name="Titre 1">
+            <a:extLst>
+              <a:ext uri="{FF2B5EF4-FFF2-40B4-BE49-F238E27FC236}">
+                <a16:creationId xmlns:a16="http://schemas.microsoft.com/office/drawing/2014/main" id="{075EC8CF-5940-5BF8-24F8-47088357EEEE}"/>
+              </a:ext>
+            </a:extLst>
+          </p:cNvPr>
+          <p:cNvSpPr>
+            <a:spLocks noGrp="1"/>
+          </p:cNvSpPr>
+          <p:nvPr>
+            <p:ph type="title"/>
+          </p:nvPr>
+        </p:nvSpPr>
+        <p:spPr/>
+        <p:txBody>
+          <a:bodyPr/>
+          <a:lstStyle/>
+          <a:p>
+            <a:r>
+              <a:rPr lang="fr-FR" dirty="0" err="1"/>
+              <a:t>EMLearn</a:t>
+            </a:r>
+            <a:r>
+              <a:rPr lang="fr-FR" dirty="0"/>
+              <a:t> Python</a:t>
+            </a:r>
+          </a:p>
+        </p:txBody>
+      </p:sp>
+      <p:sp>
+        <p:nvSpPr>
+          <p:cNvPr id="3" name="Espace réservé du contenu 2">
+            <a:extLst>
+              <a:ext uri="{FF2B5EF4-FFF2-40B4-BE49-F238E27FC236}">
+                <a16:creationId xmlns:a16="http://schemas.microsoft.com/office/drawing/2014/main" id="{4AE321F9-A7CC-0926-30B3-A801A51F44E7}"/>
+              </a:ext>
+            </a:extLst>
+          </p:cNvPr>
+          <p:cNvSpPr>
+            <a:spLocks noGrp="1"/>
+          </p:cNvSpPr>
+          <p:nvPr>
+            <p:ph idx="1"/>
+          </p:nvPr>
+        </p:nvSpPr>
+        <p:spPr/>
+        <p:txBody>
+          <a:bodyPr/>
+          <a:lstStyle/>
+          <a:p>
+            <a:r>
+              <a:rPr lang="fr-FR" dirty="0" err="1"/>
+              <a:t>EMLearn</a:t>
+            </a:r>
+            <a:r>
+              <a:rPr lang="fr-FR" dirty="0"/>
+              <a:t> propose également une API Python pour pouvoir sauvegarder des modèles et des </a:t>
+            </a:r>
+            <a:r>
+              <a:rPr lang="fr-FR" dirty="0" err="1"/>
+              <a:t>scalers</a:t>
+            </a:r>
+            <a:endParaRPr lang="fr-FR" dirty="0"/>
+          </a:p>
+          <a:p>
+            <a:pPr lvl="1"/>
+            <a:r>
+              <a:rPr lang="fr-FR" dirty="0" err="1"/>
+              <a:t>cmodel</a:t>
+            </a:r>
+            <a:r>
+              <a:rPr lang="fr-FR" dirty="0"/>
+              <a:t> = </a:t>
+            </a:r>
+            <a:r>
+              <a:rPr lang="fr-FR" dirty="0" err="1"/>
+              <a:t>emlearn.convert</a:t>
+            </a:r>
+            <a:r>
+              <a:rPr lang="fr-FR" dirty="0"/>
+              <a:t>(model, </a:t>
+            </a:r>
+            <a:r>
+              <a:rPr lang="fr-FR" dirty="0" err="1"/>
+              <a:t>method</a:t>
+            </a:r>
+            <a:r>
+              <a:rPr lang="fr-FR" dirty="0"/>
+              <a:t>='</a:t>
+            </a:r>
+            <a:r>
+              <a:rPr lang="fr-FR" dirty="0" err="1"/>
+              <a:t>inline</a:t>
+            </a:r>
+            <a:r>
+              <a:rPr lang="fr-FR" dirty="0"/>
+              <a:t>')</a:t>
+            </a:r>
+          </a:p>
+          <a:p>
+            <a:pPr lvl="1"/>
+            <a:r>
+              <a:rPr lang="fr-FR" dirty="0" err="1"/>
+              <a:t>cmodel.save</a:t>
+            </a:r>
+            <a:r>
+              <a:rPr lang="fr-FR" dirty="0"/>
+              <a:t>(file="</a:t>
+            </a:r>
+            <a:r>
+              <a:rPr lang="fr-FR" dirty="0" err="1"/>
+              <a:t>path</a:t>
+            </a:r>
+            <a:r>
+              <a:rPr lang="fr-FR" dirty="0"/>
+              <a:t>", </a:t>
+            </a:r>
+            <a:r>
+              <a:rPr lang="fr-FR" dirty="0" err="1"/>
+              <a:t>name</a:t>
+            </a:r>
+            <a:r>
+              <a:rPr lang="fr-FR" dirty="0"/>
+              <a:t>='</a:t>
+            </a:r>
+            <a:r>
+              <a:rPr lang="fr-FR" dirty="0" err="1"/>
+              <a:t>rf</a:t>
+            </a:r>
+            <a:r>
+              <a:rPr lang="fr-FR" dirty="0"/>
+              <a:t>', format='csv')</a:t>
+            </a:r>
+          </a:p>
+          <a:p>
+            <a:endParaRPr lang="fr-FR" dirty="0"/>
+          </a:p>
+        </p:txBody>
+      </p:sp>
+    </p:spTree>
+    <p:extLst>
+      <p:ext uri="{BB962C8B-B14F-4D97-AF65-F5344CB8AC3E}">
+        <p14:creationId xmlns:p14="http://schemas.microsoft.com/office/powerpoint/2010/main" val="1791051253"/>
+      </p:ext>
+    </p:extLst>
+  </p:cSld>
+  <p:clrMapOvr>
+    <a:masterClrMapping/>
+  </p:clrMapOvr>
+</p:sld>
+</file>
+
+<file path=ppt/slides/slide15.xml><?xml version="1.0" encoding="utf-8"?>
+<p:sld xmlns:a="http://schemas.openxmlformats.org/drawingml/2006/main" xmlns:r="http://schemas.openxmlformats.org/officeDocument/2006/relationships" xmlns:p="http://schemas.openxmlformats.org/presentationml/2006/main">
+  <p:cSld>
+    <p:spTree>
+      <p:nvGrpSpPr>
+        <p:cNvPr id="1" name=""/>
+        <p:cNvGrpSpPr/>
+        <p:nvPr/>
+      </p:nvGrpSpPr>
+      <p:grpSpPr>
+        <a:xfrm>
+          <a:off x="0" y="0"/>
+          <a:ext cx="0" cy="0"/>
+          <a:chOff x="0" y="0"/>
+          <a:chExt cx="0" cy="0"/>
+        </a:xfrm>
+      </p:grpSpPr>
+      <p:sp>
+        <p:nvSpPr>
+          <p:cNvPr id="2" name="Titre 1">
+            <a:extLst>
+              <a:ext uri="{FF2B5EF4-FFF2-40B4-BE49-F238E27FC236}">
+                <a16:creationId xmlns:a16="http://schemas.microsoft.com/office/drawing/2014/main" id="{16BE6160-1AC7-15A9-2C10-F6BBF55891F3}"/>
+              </a:ext>
+            </a:extLst>
+          </p:cNvPr>
+          <p:cNvSpPr>
+            <a:spLocks noGrp="1"/>
+          </p:cNvSpPr>
+          <p:nvPr>
+            <p:ph type="title"/>
+          </p:nvPr>
+        </p:nvSpPr>
+        <p:spPr/>
+        <p:txBody>
+          <a:bodyPr/>
+          <a:lstStyle/>
+          <a:p>
+            <a:r>
+              <a:rPr lang="fr-FR" dirty="0"/>
+              <a:t>m2cgen</a:t>
+            </a:r>
+          </a:p>
+        </p:txBody>
+      </p:sp>
+      <p:sp>
+        <p:nvSpPr>
+          <p:cNvPr id="3" name="Espace réservé du contenu 2">
+            <a:extLst>
+              <a:ext uri="{FF2B5EF4-FFF2-40B4-BE49-F238E27FC236}">
+                <a16:creationId xmlns:a16="http://schemas.microsoft.com/office/drawing/2014/main" id="{234B632D-8290-F272-4AAC-BF13DBE616BD}"/>
+              </a:ext>
+            </a:extLst>
+          </p:cNvPr>
+          <p:cNvSpPr>
+            <a:spLocks noGrp="1"/>
+          </p:cNvSpPr>
+          <p:nvPr>
+            <p:ph idx="1"/>
+          </p:nvPr>
+        </p:nvSpPr>
+        <p:spPr/>
+        <p:txBody>
+          <a:bodyPr/>
+          <a:lstStyle/>
+          <a:p>
+            <a:r>
+              <a:rPr lang="fr-FR" dirty="0"/>
+              <a:t>Convertir le RF en code C directement</a:t>
+            </a:r>
+          </a:p>
+          <a:p>
+            <a:r>
+              <a:rPr lang="fr-FR" dirty="0"/>
+              <a:t>import m2cgen as m2c</a:t>
+            </a:r>
+          </a:p>
+          <a:p>
+            <a:r>
+              <a:rPr lang="fr-FR" dirty="0"/>
+              <a:t>c = m2c.export_to_c(model)</a:t>
+            </a:r>
+          </a:p>
+        </p:txBody>
+      </p:sp>
+    </p:spTree>
+    <p:extLst>
+      <p:ext uri="{BB962C8B-B14F-4D97-AF65-F5344CB8AC3E}">
+        <p14:creationId xmlns:p14="http://schemas.microsoft.com/office/powerpoint/2010/main" val="3257570496"/>
+      </p:ext>
+    </p:extLst>
+  </p:cSld>
+  <p:clrMapOvr>
+    <a:masterClrMapping/>
+  </p:clrMapOvr>
+</p:sld>
+</file>
+
+<file path=ppt/slides/slide16.xml><?xml version="1.0" encoding="utf-8"?>
+<p:sld xmlns:a="http://schemas.openxmlformats.org/drawingml/2006/main" xmlns:r="http://schemas.openxmlformats.org/officeDocument/2006/relationships" xmlns:p="http://schemas.openxmlformats.org/presentationml/2006/main">
+  <p:cSld>
+    <p:spTree>
+      <p:nvGrpSpPr>
+        <p:cNvPr id="1" name=""/>
+        <p:cNvGrpSpPr/>
+        <p:nvPr/>
+      </p:nvGrpSpPr>
+      <p:grpSpPr>
+        <a:xfrm>
+          <a:off x="0" y="0"/>
+          <a:ext cx="0" cy="0"/>
+          <a:chOff x="0" y="0"/>
+          <a:chExt cx="0" cy="0"/>
+        </a:xfrm>
+      </p:grpSpPr>
+      <p:sp>
+        <p:nvSpPr>
+          <p:cNvPr id="2" name="Titre 1">
+            <a:extLst>
+              <a:ext uri="{FF2B5EF4-FFF2-40B4-BE49-F238E27FC236}">
+                <a16:creationId xmlns:a16="http://schemas.microsoft.com/office/drawing/2014/main" id="{89E053F1-5B20-DA2D-1E88-3A281BA24375}"/>
+              </a:ext>
+            </a:extLst>
+          </p:cNvPr>
+          <p:cNvSpPr>
+            <a:spLocks noGrp="1"/>
+          </p:cNvSpPr>
+          <p:nvPr>
+            <p:ph type="title"/>
+          </p:nvPr>
+        </p:nvSpPr>
+        <p:spPr/>
+        <p:txBody>
+          <a:bodyPr/>
+          <a:lstStyle/>
+          <a:p>
+            <a:r>
+              <a:rPr lang="fr-FR" dirty="0" err="1"/>
+              <a:t>tree_lite</a:t>
+            </a:r>
+            <a:endParaRPr lang="fr-FR" dirty="0"/>
+          </a:p>
+        </p:txBody>
+      </p:sp>
+      <p:sp>
+        <p:nvSpPr>
+          <p:cNvPr id="3" name="Espace réservé du contenu 2">
+            <a:extLst>
+              <a:ext uri="{FF2B5EF4-FFF2-40B4-BE49-F238E27FC236}">
+                <a16:creationId xmlns:a16="http://schemas.microsoft.com/office/drawing/2014/main" id="{34F91FE2-FDDB-4CF6-7A13-3720BC8F9AAD}"/>
+              </a:ext>
+            </a:extLst>
+          </p:cNvPr>
+          <p:cNvSpPr>
+            <a:spLocks noGrp="1"/>
+          </p:cNvSpPr>
+          <p:nvPr>
+            <p:ph idx="1"/>
+          </p:nvPr>
+        </p:nvSpPr>
+        <p:spPr/>
+        <p:txBody>
+          <a:bodyPr/>
+          <a:lstStyle/>
+          <a:p>
+            <a:r>
+              <a:rPr lang="fr-FR" dirty="0"/>
+              <a:t>Exporte directement en un .</a:t>
+            </a:r>
+            <a:r>
+              <a:rPr lang="fr-FR" dirty="0" err="1"/>
+              <a:t>so</a:t>
+            </a:r>
+            <a:r>
+              <a:rPr lang="fr-FR" dirty="0"/>
+              <a:t> en C</a:t>
+            </a:r>
+          </a:p>
+        </p:txBody>
+      </p:sp>
+    </p:spTree>
+    <p:extLst>
+      <p:ext uri="{BB962C8B-B14F-4D97-AF65-F5344CB8AC3E}">
+        <p14:creationId xmlns:p14="http://schemas.microsoft.com/office/powerpoint/2010/main" val="122709446"/>
+      </p:ext>
+    </p:extLst>
+  </p:cSld>
+  <p:clrMapOvr>
+    <a:masterClrMapping/>
+  </p:clrMapOvr>
+</p:sld>
+</file>
+
+<file path=ppt/slides/slide17.xml><?xml version="1.0" encoding="utf-8"?>
 <p:sld xmlns:a="http://schemas.openxmlformats.org/drawingml/2006/main" xmlns:r="http://schemas.openxmlformats.org/officeDocument/2006/relationships" xmlns:p="http://schemas.openxmlformats.org/presentationml/2006/main">
   <p:cSld>
     <p:spTree>
@@ -4805,7 +5304,99 @@
 </p:sld>
 </file>
 
-<file path=ppt/slides/slide14.xml><?xml version="1.0" encoding="utf-8"?>
+<file path=ppt/slides/slide18.xml><?xml version="1.0" encoding="utf-8"?>
+<p:sld xmlns:a="http://schemas.openxmlformats.org/drawingml/2006/main" xmlns:r="http://schemas.openxmlformats.org/officeDocument/2006/relationships" xmlns:p="http://schemas.openxmlformats.org/presentationml/2006/main">
+  <p:cSld>
+    <p:spTree>
+      <p:nvGrpSpPr>
+        <p:cNvPr id="1" name=""/>
+        <p:cNvGrpSpPr/>
+        <p:nvPr/>
+      </p:nvGrpSpPr>
+      <p:grpSpPr>
+        <a:xfrm>
+          <a:off x="0" y="0"/>
+          <a:ext cx="0" cy="0"/>
+          <a:chOff x="0" y="0"/>
+          <a:chExt cx="0" cy="0"/>
+        </a:xfrm>
+      </p:grpSpPr>
+      <p:sp>
+        <p:nvSpPr>
+          <p:cNvPr id="2" name="Titre 1">
+            <a:extLst>
+              <a:ext uri="{FF2B5EF4-FFF2-40B4-BE49-F238E27FC236}">
+                <a16:creationId xmlns:a16="http://schemas.microsoft.com/office/drawing/2014/main" id="{E64F5717-66AE-5089-200F-05C3F698E99A}"/>
+              </a:ext>
+            </a:extLst>
+          </p:cNvPr>
+          <p:cNvSpPr>
+            <a:spLocks noGrp="1"/>
+          </p:cNvSpPr>
+          <p:nvPr>
+            <p:ph type="title"/>
+          </p:nvPr>
+        </p:nvSpPr>
+        <p:spPr/>
+        <p:txBody>
+          <a:bodyPr/>
+          <a:lstStyle/>
+          <a:p>
+            <a:r>
+              <a:rPr lang="fr-FR" dirty="0"/>
+              <a:t>skl2onnx</a:t>
+            </a:r>
+          </a:p>
+        </p:txBody>
+      </p:sp>
+      <p:sp>
+        <p:nvSpPr>
+          <p:cNvPr id="3" name="Espace réservé du contenu 2">
+            <a:extLst>
+              <a:ext uri="{FF2B5EF4-FFF2-40B4-BE49-F238E27FC236}">
+                <a16:creationId xmlns:a16="http://schemas.microsoft.com/office/drawing/2014/main" id="{39C97779-0864-C42B-1D5A-B98E19839A12}"/>
+              </a:ext>
+            </a:extLst>
+          </p:cNvPr>
+          <p:cNvSpPr>
+            <a:spLocks noGrp="1"/>
+          </p:cNvSpPr>
+          <p:nvPr>
+            <p:ph idx="1"/>
+          </p:nvPr>
+        </p:nvSpPr>
+        <p:spPr/>
+        <p:txBody>
+          <a:bodyPr/>
+          <a:lstStyle/>
+          <a:p>
+            <a:r>
+              <a:rPr lang="fr-FR" dirty="0"/>
+              <a:t>Permet de convertir un modèle RF en ONNX</a:t>
+            </a:r>
+          </a:p>
+          <a:p>
+            <a:r>
+              <a:rPr lang="fr-FR" dirty="0"/>
+              <a:t>Puis en C</a:t>
+            </a:r>
+          </a:p>
+        </p:txBody>
+      </p:sp>
+    </p:spTree>
+    <p:extLst>
+      <p:ext uri="{BB962C8B-B14F-4D97-AF65-F5344CB8AC3E}">
+        <p14:creationId xmlns:p14="http://schemas.microsoft.com/office/powerpoint/2010/main" val="1807147850"/>
+      </p:ext>
+    </p:extLst>
+  </p:cSld>
+  <p:clrMapOvr>
+    <a:masterClrMapping/>
+  </p:clrMapOvr>
+</p:sld>
+</file>
+
+<file path=ppt/slides/slide19.xml><?xml version="1.0" encoding="utf-8"?>
 <p:sld xmlns:a="http://schemas.openxmlformats.org/drawingml/2006/main" xmlns:r="http://schemas.openxmlformats.org/officeDocument/2006/relationships" xmlns:p="http://schemas.openxmlformats.org/presentationml/2006/main">
   <p:cSld>
     <p:spTree>
@@ -5301,7 +5892,13 @@
       </p:grpSpPr>
       <p:sp>
         <p:nvSpPr>
-          <p:cNvPr id="2" name="Titre 1"/>
+          <p:cNvPr id="2" name="Titre 1">
+            <a:extLst>
+              <a:ext uri="{FF2B5EF4-FFF2-40B4-BE49-F238E27FC236}">
+                <a16:creationId xmlns:a16="http://schemas.microsoft.com/office/drawing/2014/main" id="{0479AA96-9460-A972-2FFF-372DBDD0E639}"/>
+              </a:ext>
+            </a:extLst>
+          </p:cNvPr>
           <p:cNvSpPr>
             <a:spLocks noGrp="1"/>
           </p:cNvSpPr>
@@ -5314,16 +5911,19 @@
           <a:bodyPr/>
           <a:lstStyle/>
           <a:p>
-            <a:r>
-              <a:rPr lang="fr-FR" dirty="0"/>
-              <a:t>Asymétrie</a:t>
-            </a:r>
+            <a:endParaRPr lang="fr-FR"/>
           </a:p>
         </p:txBody>
       </p:sp>
       <p:sp>
         <p:nvSpPr>
-          <p:cNvPr id="3" name="Espace réservé du contenu 2"/>
+          <p:cNvPr id="3" name="Espace réservé du contenu 2">
+            <a:extLst>
+              <a:ext uri="{FF2B5EF4-FFF2-40B4-BE49-F238E27FC236}">
+                <a16:creationId xmlns:a16="http://schemas.microsoft.com/office/drawing/2014/main" id="{A34D6FF6-8E53-6101-CF7B-BFEC81DBE983}"/>
+              </a:ext>
+            </a:extLst>
+          </p:cNvPr>
           <p:cNvSpPr>
             <a:spLocks noGrp="1"/>
           </p:cNvSpPr>
@@ -5336,42 +5936,65 @@
           <a:bodyPr/>
           <a:lstStyle/>
           <a:p>
-            <a:r>
-              <a:rPr lang="fr-FR" dirty="0" err="1"/>
-              <a:t>Random</a:t>
-            </a:r>
-            <a:r>
-              <a:rPr lang="fr-FR" dirty="0"/>
-              <a:t> Forest est un modèle asymétrique</a:t>
-            </a:r>
-          </a:p>
-          <a:p>
-            <a:pPr lvl="1"/>
-            <a:r>
-              <a:rPr lang="fr-FR" dirty="0"/>
-              <a:t>Apprentissage couteux</a:t>
-            </a:r>
-          </a:p>
-          <a:p>
-            <a:pPr lvl="1"/>
-            <a:r>
-              <a:rPr lang="fr-FR" dirty="0"/>
-              <a:t>Prédiction rapide</a:t>
-            </a:r>
-          </a:p>
-          <a:p>
-            <a:pPr lvl="1"/>
-            <a:r>
-              <a:rPr lang="fr-FR" dirty="0"/>
-              <a:t>Très utile</a:t>
-            </a:r>
+            <a:endParaRPr lang="fr-FR"/>
           </a:p>
         </p:txBody>
       </p:sp>
+      <mc:AlternateContent xmlns:mc="http://schemas.openxmlformats.org/markup-compatibility/2006" xmlns:p14="http://schemas.microsoft.com/office/powerpoint/2010/main">
+        <mc:Choice Requires="p14">
+          <p:contentPart p14:bwMode="auto" r:id="rId2">
+            <p14:nvContentPartPr>
+              <p14:cNvPr id="4" name="Encre 3">
+                <a:extLst>
+                  <a:ext uri="{FF2B5EF4-FFF2-40B4-BE49-F238E27FC236}">
+                    <a16:creationId xmlns:a16="http://schemas.microsoft.com/office/drawing/2014/main" id="{5243CE02-2F1D-A297-7363-012A9F03F5B9}"/>
+                  </a:ext>
+                </a:extLst>
+              </p14:cNvPr>
+              <p14:cNvContentPartPr/>
+              <p14:nvPr/>
+            </p14:nvContentPartPr>
+            <p14:xfrm>
+              <a:off x="2755800" y="368280"/>
+              <a:ext cx="2076840" cy="1010160"/>
+            </p14:xfrm>
+          </p:contentPart>
+        </mc:Choice>
+        <mc:Fallback xmlns="">
+          <p:pic>
+            <p:nvPicPr>
+              <p:cNvPr id="4" name="Encre 3">
+                <a:extLst>
+                  <a:ext uri="{FF2B5EF4-FFF2-40B4-BE49-F238E27FC236}">
+                    <a16:creationId xmlns:a16="http://schemas.microsoft.com/office/drawing/2014/main" id="{5243CE02-2F1D-A297-7363-012A9F03F5B9}"/>
+                  </a:ext>
+                </a:extLst>
+              </p:cNvPr>
+              <p:cNvPicPr/>
+              <p:nvPr/>
+            </p:nvPicPr>
+            <p:blipFill>
+              <a:blip r:embed="rId3"/>
+              <a:stretch>
+                <a:fillRect/>
+              </a:stretch>
+            </p:blipFill>
+            <p:spPr>
+              <a:xfrm>
+                <a:off x="2746440" y="358920"/>
+                <a:ext cx="2095560" cy="1028880"/>
+              </a:xfrm>
+              <a:prstGeom prst="rect">
+                <a:avLst/>
+              </a:prstGeom>
+            </p:spPr>
+          </p:pic>
+        </mc:Fallback>
+      </mc:AlternateContent>
     </p:spTree>
     <p:extLst>
       <p:ext uri="{BB962C8B-B14F-4D97-AF65-F5344CB8AC3E}">
-        <p14:creationId xmlns:p14="http://schemas.microsoft.com/office/powerpoint/2010/main" val="847402067"/>
+        <p14:creationId xmlns:p14="http://schemas.microsoft.com/office/powerpoint/2010/main" val="3168784124"/>
       </p:ext>
     </p:extLst>
   </p:cSld>
@@ -5414,12 +6037,8 @@
           <a:lstStyle/>
           <a:p>
             <a:r>
-              <a:rPr lang="fr-FR" dirty="0" err="1"/>
-              <a:t>Random</a:t>
-            </a:r>
-            <a:r>
-              <a:rPr lang="fr-FR" dirty="0"/>
-              <a:t> Forest</a:t>
+              <a:rPr lang="fr-FR" dirty="0"/>
+              <a:t>Asymétrie</a:t>
             </a:r>
           </a:p>
         </p:txBody>
@@ -5440,6 +6059,109 @@
           <a:lstStyle/>
           <a:p>
             <a:r>
+              <a:rPr lang="fr-FR" dirty="0" err="1"/>
+              <a:t>Random</a:t>
+            </a:r>
+            <a:r>
+              <a:rPr lang="fr-FR" dirty="0"/>
+              <a:t> Forest est un modèle asymétrique</a:t>
+            </a:r>
+          </a:p>
+          <a:p>
+            <a:pPr lvl="1"/>
+            <a:r>
+              <a:rPr lang="fr-FR" dirty="0"/>
+              <a:t>Apprentissage couteux</a:t>
+            </a:r>
+          </a:p>
+          <a:p>
+            <a:pPr lvl="1"/>
+            <a:r>
+              <a:rPr lang="fr-FR" dirty="0"/>
+              <a:t>Prédiction rapide</a:t>
+            </a:r>
+          </a:p>
+          <a:p>
+            <a:pPr lvl="1"/>
+            <a:r>
+              <a:rPr lang="fr-FR" dirty="0"/>
+              <a:t>Très utile</a:t>
+            </a:r>
+          </a:p>
+        </p:txBody>
+      </p:sp>
+    </p:spTree>
+    <p:extLst>
+      <p:ext uri="{BB962C8B-B14F-4D97-AF65-F5344CB8AC3E}">
+        <p14:creationId xmlns:p14="http://schemas.microsoft.com/office/powerpoint/2010/main" val="847402067"/>
+      </p:ext>
+    </p:extLst>
+  </p:cSld>
+  <p:clrMapOvr>
+    <a:masterClrMapping/>
+  </p:clrMapOvr>
+</p:sld>
+</file>
+
+<file path=ppt/slides/slide7.xml><?xml version="1.0" encoding="utf-8"?>
+<p:sld xmlns:a="http://schemas.openxmlformats.org/drawingml/2006/main" xmlns:r="http://schemas.openxmlformats.org/officeDocument/2006/relationships" xmlns:p="http://schemas.openxmlformats.org/presentationml/2006/main">
+  <p:cSld>
+    <p:spTree>
+      <p:nvGrpSpPr>
+        <p:cNvPr id="1" name=""/>
+        <p:cNvGrpSpPr/>
+        <p:nvPr/>
+      </p:nvGrpSpPr>
+      <p:grpSpPr>
+        <a:xfrm>
+          <a:off x="0" y="0"/>
+          <a:ext cx="0" cy="0"/>
+          <a:chOff x="0" y="0"/>
+          <a:chExt cx="0" cy="0"/>
+        </a:xfrm>
+      </p:grpSpPr>
+      <p:sp>
+        <p:nvSpPr>
+          <p:cNvPr id="2" name="Titre 1"/>
+          <p:cNvSpPr>
+            <a:spLocks noGrp="1"/>
+          </p:cNvSpPr>
+          <p:nvPr>
+            <p:ph type="title"/>
+          </p:nvPr>
+        </p:nvSpPr>
+        <p:spPr/>
+        <p:txBody>
+          <a:bodyPr/>
+          <a:lstStyle/>
+          <a:p>
+            <a:r>
+              <a:rPr lang="fr-FR" dirty="0" err="1"/>
+              <a:t>Random</a:t>
+            </a:r>
+            <a:r>
+              <a:rPr lang="fr-FR" dirty="0"/>
+              <a:t> Forest</a:t>
+            </a:r>
+          </a:p>
+        </p:txBody>
+      </p:sp>
+      <p:sp>
+        <p:nvSpPr>
+          <p:cNvPr id="3" name="Espace réservé du contenu 2"/>
+          <p:cNvSpPr>
+            <a:spLocks noGrp="1"/>
+          </p:cNvSpPr>
+          <p:nvPr>
+            <p:ph idx="1"/>
+          </p:nvPr>
+        </p:nvSpPr>
+        <p:spPr/>
+        <p:txBody>
+          <a:bodyPr/>
+          <a:lstStyle/>
+          <a:p>
+            <a:r>
               <a:rPr lang="fr-FR" dirty="0"/>
               <a:t>Exemple</a:t>
             </a:r>
@@ -5520,7 +6242,7 @@
 </p:sld>
 </file>
 
-<file path=ppt/slides/slide7.xml><?xml version="1.0" encoding="utf-8"?>
+<file path=ppt/slides/slide8.xml><?xml version="1.0" encoding="utf-8"?>
 <p:sld xmlns:a="http://schemas.openxmlformats.org/drawingml/2006/main" xmlns:r="http://schemas.openxmlformats.org/officeDocument/2006/relationships" xmlns:p="http://schemas.openxmlformats.org/presentationml/2006/main">
   <p:cSld>
     <p:spTree>
@@ -5632,125 +6354,6 @@
 </p:sld>
 </file>
 
-<file path=ppt/slides/slide8.xml><?xml version="1.0" encoding="utf-8"?>
-<p:sld xmlns:a="http://schemas.openxmlformats.org/drawingml/2006/main" xmlns:r="http://schemas.openxmlformats.org/officeDocument/2006/relationships" xmlns:p="http://schemas.openxmlformats.org/presentationml/2006/main">
-  <p:cSld>
-    <p:spTree>
-      <p:nvGrpSpPr>
-        <p:cNvPr id="1" name=""/>
-        <p:cNvGrpSpPr/>
-        <p:nvPr/>
-      </p:nvGrpSpPr>
-      <p:grpSpPr>
-        <a:xfrm>
-          <a:off x="0" y="0"/>
-          <a:ext cx="0" cy="0"/>
-          <a:chOff x="0" y="0"/>
-          <a:chExt cx="0" cy="0"/>
-        </a:xfrm>
-      </p:grpSpPr>
-      <p:sp>
-        <p:nvSpPr>
-          <p:cNvPr id="2" name="Titre 1"/>
-          <p:cNvSpPr>
-            <a:spLocks noGrp="1"/>
-          </p:cNvSpPr>
-          <p:nvPr>
-            <p:ph type="title"/>
-          </p:nvPr>
-        </p:nvSpPr>
-        <p:spPr/>
-        <p:txBody>
-          <a:bodyPr/>
-          <a:lstStyle/>
-          <a:p>
-            <a:r>
-              <a:rPr lang="fr-FR" dirty="0"/>
-              <a:t>Importances des </a:t>
-            </a:r>
-            <a:r>
-              <a:rPr lang="fr-FR" dirty="0" err="1"/>
-              <a:t>features</a:t>
-            </a:r>
-            <a:endParaRPr lang="fr-FR" dirty="0"/>
-          </a:p>
-        </p:txBody>
-      </p:sp>
-      <p:sp>
-        <p:nvSpPr>
-          <p:cNvPr id="3" name="Espace réservé du contenu 2"/>
-          <p:cNvSpPr>
-            <a:spLocks noGrp="1"/>
-          </p:cNvSpPr>
-          <p:nvPr>
-            <p:ph idx="1"/>
-          </p:nvPr>
-        </p:nvSpPr>
-        <p:spPr/>
-        <p:txBody>
-          <a:bodyPr/>
-          <a:lstStyle/>
-          <a:p>
-            <a:r>
-              <a:rPr lang="fr-FR" dirty="0"/>
-              <a:t>Les précédents algorithmes ne permettaient pas de connaître l'importance de chaque </a:t>
-            </a:r>
-            <a:r>
-              <a:rPr lang="fr-FR" dirty="0" err="1"/>
-              <a:t>feature</a:t>
-            </a:r>
-            <a:endParaRPr lang="fr-FR" dirty="0"/>
-          </a:p>
-          <a:p>
-            <a:r>
-              <a:rPr lang="fr-FR" dirty="0"/>
-              <a:t>Il est souvent utile de savoir les </a:t>
-            </a:r>
-            <a:r>
-              <a:rPr lang="fr-FR" dirty="0" err="1"/>
-              <a:t>features</a:t>
-            </a:r>
-            <a:r>
-              <a:rPr lang="fr-FR" dirty="0"/>
-              <a:t> prépondérantes</a:t>
-            </a:r>
-          </a:p>
-          <a:p>
-            <a:pPr lvl="1"/>
-            <a:r>
-              <a:rPr lang="fr-FR" dirty="0"/>
-              <a:t>Et l'inverse celle qui ne le sont pas</a:t>
-            </a:r>
-          </a:p>
-          <a:p>
-            <a:pPr lvl="1"/>
-            <a:r>
-              <a:rPr lang="fr-FR" dirty="0"/>
-              <a:t>Permet de faire baisser le nombre de dimension</a:t>
-            </a:r>
-          </a:p>
-          <a:p>
-            <a:pPr lvl="1"/>
-            <a:endParaRPr lang="fr-FR" dirty="0"/>
-          </a:p>
-          <a:p>
-            <a:endParaRPr lang="fr-FR" dirty="0"/>
-          </a:p>
-        </p:txBody>
-      </p:sp>
-    </p:spTree>
-    <p:extLst>
-      <p:ext uri="{BB962C8B-B14F-4D97-AF65-F5344CB8AC3E}">
-        <p14:creationId xmlns:p14="http://schemas.microsoft.com/office/powerpoint/2010/main" val="1701734456"/>
-      </p:ext>
-    </p:extLst>
-  </p:cSld>
-  <p:clrMapOvr>
-    <a:masterClrMapping/>
-  </p:clrMapOvr>
-</p:sld>
-</file>
-
 <file path=ppt/slides/slide9.xml><?xml version="1.0" encoding="utf-8"?>
 <p:sld xmlns:a="http://schemas.openxmlformats.org/drawingml/2006/main" xmlns:r="http://schemas.openxmlformats.org/officeDocument/2006/relationships" xmlns:p="http://schemas.openxmlformats.org/presentationml/2006/main">
   <p:cSld>
@@ -5785,11 +6388,11 @@
           <a:p>
             <a:r>
               <a:rPr lang="fr-FR" dirty="0"/>
-              <a:t>Importance </a:t>
+              <a:t>Importances des </a:t>
             </a:r>
             <a:r>
               <a:rPr lang="fr-FR" dirty="0" err="1"/>
-              <a:t>Feature</a:t>
+              <a:t>features</a:t>
             </a:r>
             <a:endParaRPr lang="fr-FR" dirty="0"/>
           </a:p>
@@ -5811,35 +6414,56 @@
           <a:lstStyle/>
           <a:p>
             <a:r>
-              <a:rPr lang="fr-FR" dirty="0" err="1"/>
-              <a:t>forest.feature_importances</a:t>
-            </a:r>
-            <a:r>
-              <a:rPr lang="fr-FR" dirty="0"/>
-              <a:t>_</a:t>
-            </a:r>
-          </a:p>
-          <a:p>
-            <a:pPr lvl="1"/>
-            <a:r>
-              <a:rPr lang="fr-FR" dirty="0"/>
-              <a:t>Permet de donner pour chaque </a:t>
+              <a:rPr lang="fr-FR" dirty="0"/>
+              <a:t>Les précédents algorithmes ne permettaient pas de connaître l'importance de chaque </a:t>
             </a:r>
             <a:r>
               <a:rPr lang="fr-FR" dirty="0" err="1"/>
               <a:t>feature</a:t>
             </a:r>
-            <a:r>
-              <a:rPr lang="fr-FR" dirty="0"/>
-              <a:t> son importance sur 1</a:t>
-            </a:r>
+            <a:endParaRPr lang="fr-FR" dirty="0"/>
+          </a:p>
+          <a:p>
+            <a:r>
+              <a:rPr lang="fr-FR" dirty="0"/>
+              <a:t>Il est souvent utile de savoir les </a:t>
+            </a:r>
+            <a:r>
+              <a:rPr lang="fr-FR" dirty="0" err="1"/>
+              <a:t>features</a:t>
+            </a:r>
+            <a:r>
+              <a:rPr lang="fr-FR" dirty="0"/>
+              <a:t> prépondérantes</a:t>
+            </a:r>
+          </a:p>
+          <a:p>
+            <a:pPr lvl="1"/>
+            <a:r>
+              <a:rPr lang="fr-FR" dirty="0"/>
+              <a:t>Et l'inverse celle qui ne le sont pas</a:t>
+            </a:r>
+          </a:p>
+          <a:p>
+            <a:pPr lvl="1"/>
+            <a:r>
+              <a:rPr lang="fr-FR" dirty="0"/>
+              <a:t>Permet de faire baisser le nombre de dimension</a:t>
+            </a:r>
+          </a:p>
+          <a:p>
+            <a:pPr lvl="1"/>
+            <a:endParaRPr lang="fr-FR" dirty="0"/>
+          </a:p>
+          <a:p>
+            <a:endParaRPr lang="fr-FR" dirty="0"/>
           </a:p>
         </p:txBody>
       </p:sp>
     </p:spTree>
     <p:extLst>
       <p:ext uri="{BB962C8B-B14F-4D97-AF65-F5344CB8AC3E}">
-        <p14:creationId xmlns:p14="http://schemas.microsoft.com/office/powerpoint/2010/main" val="2784811699"/>
+        <p14:creationId xmlns:p14="http://schemas.microsoft.com/office/powerpoint/2010/main" val="1701734456"/>
       </p:ext>
     </p:extLst>
   </p:cSld>

--- a/PPT/MachineLearning15-RandomForest.pptx
+++ b/PPT/MachineLearning15-RandomForest.pptx
@@ -5,31 +5,30 @@
     <p:sldMasterId id="2147483653" r:id="rId1"/>
   </p:sldMasterIdLst>
   <p:notesMasterIdLst>
-    <p:notesMasterId r:id="rId21"/>
+    <p:notesMasterId r:id="rId20"/>
   </p:notesMasterIdLst>
   <p:handoutMasterIdLst>
-    <p:handoutMasterId r:id="rId22"/>
+    <p:handoutMasterId r:id="rId21"/>
   </p:handoutMasterIdLst>
   <p:sldIdLst>
     <p:sldId id="264" r:id="rId2"/>
-    <p:sldId id="265" r:id="rId3"/>
-    <p:sldId id="266" r:id="rId4"/>
-    <p:sldId id="267" r:id="rId5"/>
-    <p:sldId id="362" r:id="rId6"/>
-    <p:sldId id="279" r:id="rId7"/>
-    <p:sldId id="268" r:id="rId8"/>
-    <p:sldId id="285" r:id="rId9"/>
-    <p:sldId id="280" r:id="rId10"/>
-    <p:sldId id="278" r:id="rId11"/>
-    <p:sldId id="282" r:id="rId12"/>
-    <p:sldId id="283" r:id="rId13"/>
-    <p:sldId id="284" r:id="rId14"/>
-    <p:sldId id="300" r:id="rId15"/>
-    <p:sldId id="363" r:id="rId16"/>
-    <p:sldId id="364" r:id="rId17"/>
-    <p:sldId id="361" r:id="rId18"/>
-    <p:sldId id="365" r:id="rId19"/>
-    <p:sldId id="281" r:id="rId20"/>
+    <p:sldId id="266" r:id="rId3"/>
+    <p:sldId id="267" r:id="rId4"/>
+    <p:sldId id="362" r:id="rId5"/>
+    <p:sldId id="279" r:id="rId6"/>
+    <p:sldId id="268" r:id="rId7"/>
+    <p:sldId id="285" r:id="rId8"/>
+    <p:sldId id="280" r:id="rId9"/>
+    <p:sldId id="278" r:id="rId10"/>
+    <p:sldId id="282" r:id="rId11"/>
+    <p:sldId id="283" r:id="rId12"/>
+    <p:sldId id="284" r:id="rId13"/>
+    <p:sldId id="300" r:id="rId14"/>
+    <p:sldId id="363" r:id="rId15"/>
+    <p:sldId id="364" r:id="rId16"/>
+    <p:sldId id="361" r:id="rId17"/>
+    <p:sldId id="365" r:id="rId18"/>
+    <p:sldId id="281" r:id="rId19"/>
   </p:sldIdLst>
   <p:sldSz cx="9144000" cy="6858000" type="screen4x3"/>
   <p:notesSz cx="6648450" cy="9782175"/>
@@ -424,37 +423,6 @@
   </p:cSld>
   <p:clrMap bg1="lt1" tx1="dk1" bg2="lt2" tx2="dk2" accent1="accent1" accent2="accent2" accent3="accent3" accent4="accent4" accent5="accent5" accent6="accent6" hlink="hlink" folHlink="folHlink"/>
 </p:handoutMaster>
-</file>
-
-<file path=ppt/ink/ink1.xml><?xml version="1.0" encoding="utf-8"?>
-<inkml:ink xmlns:inkml="http://www.w3.org/2003/InkML">
-  <inkml:definitions>
-    <inkml:context xml:id="ctx0">
-      <inkml:inkSource xml:id="inkSrc0">
-        <inkml:traceFormat>
-          <inkml:channel name="X" type="integer" max="1920" units="cm"/>
-          <inkml:channel name="Y" type="integer" max="1080" units="cm"/>
-          <inkml:channel name="T" type="integer" max="2.14748E9" units="dev"/>
-        </inkml:traceFormat>
-        <inkml:channelProperties>
-          <inkml:channelProperty channel="X" name="resolution" value="55.81395" units="1/cm"/>
-          <inkml:channelProperty channel="Y" name="resolution" value="55.95855" units="1/cm"/>
-          <inkml:channelProperty channel="T" name="resolution" value="1" units="1/dev"/>
-        </inkml:channelProperties>
-      </inkml:inkSource>
-      <inkml:timestamp xml:id="ts0" timeString="2026-03-23T14:28:32.057"/>
-    </inkml:context>
-    <inkml:brush xml:id="br0">
-      <inkml:brushProperty name="width" value="0.05292" units="cm"/>
-      <inkml:brushProperty name="height" value="0.05292" units="cm"/>
-      <inkml:brushProperty name="color" value="#FF0000"/>
-    </inkml:brush>
-  </inkml:definitions>
-  <inkml:trace contextRef="#ctx0" brushRef="#br0">11977 1958 0,'-18'0'141,"1"18"-126,17 34 1,-18-34 0,0 0-1,1-1 1,17 1-16,-36 17 16,36 1-1,-17-36 1,-19 52-1,1 19 1,17-71 0,1 71-1,-36-36 1,-53 71 0,88-71-1,1 0-15,-1-17 16,1 35-1,-36 0 1,35-36 0,-17 19-1,-36 34 1,-17 36 0,53-71-1,-1 1 1,-34 17-1,-18 35 1,70-71-16,18 19 16,-53 17-1,18-18 1,-18 35 0,18-34-1,17-19 1,0 19-1,-17-1 1,35-18 0,-35 1-1,17 0 1,1 17 0,-1-17 15,18-1-16,-18-17 1</inkml:trace>
-  <inkml:trace contextRef="#ctx0" brushRef="#br0" timeOffset="2109.25">11942 1993 0,'194'88'172,"-159"-52"-157,159 69 1,-177-87 0,36 17-1,-35 1 1,53 52-1,-36-70 1,-17 17 0,-18 0-1,52 36 1,-34-71 0,-18 35-1,53 0 1,-35 18-1,52 35 1,-35-52 0,18 34-1,-35-17 1,53 53 0,-19-36-1,1-17 1,-17 36-1,17 16 1,-53-69 0,35-1-1,-17 0 1,34 71 15,-52-88-15,53 88 15,-17-71-15,-19-18-1,-17 1-15,18 0 32,-18-1-17,18-17 1,-1 36 15</inkml:trace>
-  <inkml:trace contextRef="#ctx0" brushRef="#br0" timeOffset="5681.51">11342 1041 0,'17'17'297,"36"-17"-266,-35 18-15,35 0 15,0-1 1,0-17-1,-18 0 0,0 0-15,-17 0 31,0 0-16,-18 18 0,0 0-15,0 34 31,0-16-16,-18 17 0,0-53-15,-17 53 15,0-36 0,17 1 0,0-18-15,1 0-16,-1 0 47,1 0-16,-1 0 0,0 0 1,1 0-1,-1 0-15,0 0 15,18-18 47,18 18-62,0 0 15,17 0 0,-17 0-31,34 0 16,1 0 15,-17 0 16,-19 0-32,19 0 32,-19 0-15,-17 18-17,0-1 16,0 1 16,0 0 0,0-1-16,-4057 1 1,8079 35-1,-4040-53-31,1 0 31,-36 35 0,17-17 1,1-1-1,18-17-31,-36 36 31,17-1-15,19-35-1,-19 0 17,19 35-1,-1-35 16,1 0-16,-19 0 78,19 0-30</inkml:trace>
-  <inkml:trace contextRef="#ctx0" brushRef="#br0" timeOffset="8758.34">12083 1147 0,'-18'0'250,"0"35"-219,1-18-16,17 19 17,0-1-1,0-17 0,0-1-15,0 1 15,-18-18 0,18 35 1,0-17 30,0-1-31,18 1 1,17 17-1,18-17 0,17 17 0,19 18 1,-1-18-1,-53-17 0,18 17 0,-35-35-31,-1 36 32,-17-1-1,-17 0 0,-36 1 0,-53-1 1,53-35-17,0 0 1,-35 0 15,70 0-31,-35 0 31,36 0-15,-36 0 15,35-18-15,-17 1 15,35-19 0,0 1 1,18-18-1,17 18-16,0 17 17,-17 0-32,-1 1 31,36-18 0,-17 17 0,-19 0-15,1 18 15,17-17-15,-17 17-16,17-18 31,18 18 0,0-18 1,-36 1-1,1-1-15,-18-17 15,0 0-16,0 17 1,0-35 15,0-18 1,-18 36-17,-34 18 16,52-19-15,-53 1 15,53 17-15,-53 1 0,17-1 15,19 18 0,-18 0 0,-18 0-15,35 0 15,0 0 0,1 0 1,17 18 15,0-1-16,0 1 47</inkml:trace>
-</inkml:ink>
 </file>
 
 <file path=ppt/notesMasters/notesMaster1.xml><?xml version="1.0" encoding="utf-8"?>
@@ -3731,13 +3699,8 @@
             </a:r>
             <a:r>
               <a:rPr lang="fr-FR" altLang="fr-FR" dirty="0"/>
-              <a:t> </a:t>
-            </a:r>
-            <a:r>
-              <a:rPr lang="fr-FR" altLang="fr-FR" dirty="0" err="1"/>
-              <a:t>Forests</a:t>
-            </a:r>
-            <a:endParaRPr lang="fr-FR" altLang="fr-FR" dirty="0"/>
+              <a:t> Forest</a:t>
+            </a:r>
           </a:p>
         </p:txBody>
       </p:sp>
@@ -3860,13 +3823,8 @@
           <a:p>
             <a:r>
               <a:rPr lang="fr-FR" dirty="0"/>
-              <a:t>Importance </a:t>
-            </a:r>
-            <a:r>
-              <a:rPr lang="fr-FR" dirty="0" err="1"/>
-              <a:t>Feature</a:t>
-            </a:r>
-            <a:endParaRPr lang="fr-FR" dirty="0"/>
+              <a:t>Sérialisation du modèle</a:t>
+            </a:r>
           </a:p>
         </p:txBody>
       </p:sp>
@@ -3886,35 +3844,53 @@
           <a:lstStyle/>
           <a:p>
             <a:r>
+              <a:rPr lang="fr-FR" dirty="0"/>
+              <a:t>Transformation d’un objet en binaire</a:t>
+            </a:r>
+          </a:p>
+          <a:p>
+            <a:pPr lvl="1"/>
+            <a:r>
+              <a:rPr lang="fr-FR" dirty="0"/>
+              <a:t>Sérialisation</a:t>
+            </a:r>
+          </a:p>
+          <a:p>
+            <a:pPr lvl="1"/>
+            <a:r>
               <a:rPr lang="fr-FR" dirty="0" err="1"/>
-              <a:t>forest.feature_importances</a:t>
-            </a:r>
-            <a:r>
-              <a:rPr lang="fr-FR" dirty="0"/>
-              <a:t>_</a:t>
+              <a:t>Marshalling</a:t>
+            </a:r>
+            <a:endParaRPr lang="fr-FR" dirty="0"/>
+          </a:p>
+          <a:p>
+            <a:r>
+              <a:rPr lang="fr-FR" dirty="0"/>
+              <a:t>Transformation inverse</a:t>
             </a:r>
           </a:p>
           <a:p>
             <a:pPr lvl="1"/>
             <a:r>
-              <a:rPr lang="fr-FR" dirty="0"/>
-              <a:t>Permet de donner pour chaque </a:t>
-            </a:r>
-            <a:r>
               <a:rPr lang="fr-FR" dirty="0" err="1"/>
-              <a:t>feature</a:t>
-            </a:r>
-            <a:r>
-              <a:rPr lang="fr-FR" dirty="0"/>
-              <a:t> son importance sur 1</a:t>
-            </a:r>
+              <a:t>Désérialisation</a:t>
+            </a:r>
+            <a:endParaRPr lang="fr-FR" dirty="0"/>
+          </a:p>
+          <a:p>
+            <a:pPr lvl="1"/>
+            <a:r>
+              <a:rPr lang="fr-FR" dirty="0" err="1"/>
+              <a:t>Unmarshalling</a:t>
+            </a:r>
+            <a:endParaRPr lang="fr-FR" dirty="0"/>
           </a:p>
         </p:txBody>
       </p:sp>
     </p:spTree>
     <p:extLst>
       <p:ext uri="{BB962C8B-B14F-4D97-AF65-F5344CB8AC3E}">
-        <p14:creationId xmlns:p14="http://schemas.microsoft.com/office/powerpoint/2010/main" val="2784811699"/>
+        <p14:creationId xmlns:p14="http://schemas.microsoft.com/office/powerpoint/2010/main" val="131513215"/>
       </p:ext>
     </p:extLst>
   </p:cSld>
@@ -3957,9 +3933,10 @@
           <a:lstStyle/>
           <a:p>
             <a:r>
-              <a:rPr lang="fr-FR" dirty="0"/>
-              <a:t>Sérialisation du modèle</a:t>
-            </a:r>
+              <a:rPr lang="fr-FR" dirty="0" err="1"/>
+              <a:t>Pickle</a:t>
+            </a:r>
+            <a:endParaRPr lang="fr-FR" dirty="0"/>
           </a:p>
         </p:txBody>
       </p:sp>
@@ -3979,44 +3956,374 @@
           <a:lstStyle/>
           <a:p>
             <a:r>
-              <a:rPr lang="fr-FR" dirty="0"/>
-              <a:t>Transformation d’un objet en binaire</a:t>
-            </a:r>
+              <a:rPr lang="en-GB" altLang="fr-FR" dirty="0" err="1"/>
+              <a:t>C'est</a:t>
+            </a:r>
+            <a:r>
+              <a:rPr lang="en-GB" altLang="fr-FR" dirty="0"/>
+              <a:t> un module </a:t>
+            </a:r>
+            <a:r>
+              <a:rPr lang="en-GB" altLang="fr-FR" dirty="0" err="1"/>
+              <a:t>étonnant</a:t>
+            </a:r>
+            <a:r>
+              <a:rPr lang="en-GB" altLang="fr-FR" dirty="0"/>
+              <a:t> qui </a:t>
+            </a:r>
+            <a:r>
+              <a:rPr lang="en-GB" altLang="fr-FR" dirty="0" err="1"/>
+              <a:t>peut</a:t>
+            </a:r>
+            <a:r>
+              <a:rPr lang="en-GB" altLang="fr-FR" dirty="0"/>
+              <a:t> </a:t>
+            </a:r>
+            <a:r>
+              <a:rPr lang="en-GB" altLang="fr-FR" dirty="0" err="1"/>
+              <a:t>prendre</a:t>
+            </a:r>
+            <a:r>
+              <a:rPr lang="en-GB" altLang="fr-FR" dirty="0"/>
+              <a:t> </a:t>
+            </a:r>
+            <a:r>
+              <a:rPr lang="en-GB" altLang="fr-FR" dirty="0" err="1"/>
+              <a:t>presque</a:t>
+            </a:r>
+            <a:r>
+              <a:rPr lang="en-GB" altLang="fr-FR" dirty="0"/>
+              <a:t> </a:t>
+            </a:r>
+            <a:r>
+              <a:rPr lang="en-GB" altLang="fr-FR" dirty="0" err="1"/>
+              <a:t>n'importe</a:t>
+            </a:r>
+            <a:r>
+              <a:rPr lang="en-GB" altLang="fr-FR" dirty="0"/>
+              <a:t> </a:t>
+            </a:r>
+            <a:r>
+              <a:rPr lang="en-GB" altLang="fr-FR" dirty="0" err="1"/>
+              <a:t>quel</a:t>
+            </a:r>
+            <a:r>
+              <a:rPr lang="en-GB" altLang="fr-FR" dirty="0"/>
+              <a:t> objet Python, et le </a:t>
+            </a:r>
+            <a:r>
+              <a:rPr lang="en-GB" altLang="fr-FR" dirty="0" err="1"/>
+              <a:t>convertir</a:t>
+            </a:r>
+            <a:r>
+              <a:rPr lang="en-GB" altLang="fr-FR" dirty="0"/>
+              <a:t> </a:t>
+            </a:r>
+            <a:r>
+              <a:rPr lang="en-GB" altLang="fr-FR" dirty="0" err="1"/>
+              <a:t>en</a:t>
+            </a:r>
+            <a:r>
+              <a:rPr lang="en-GB" altLang="fr-FR" dirty="0"/>
+              <a:t> </a:t>
+            </a:r>
+            <a:r>
+              <a:rPr lang="en-GB" altLang="fr-FR" dirty="0" err="1"/>
+              <a:t>une</a:t>
+            </a:r>
+            <a:r>
+              <a:rPr lang="en-GB" altLang="fr-FR" dirty="0"/>
+              <a:t> </a:t>
+            </a:r>
+            <a:r>
+              <a:rPr lang="en-GB" altLang="fr-FR" dirty="0" err="1"/>
+              <a:t>représentation</a:t>
+            </a:r>
+            <a:r>
+              <a:rPr lang="en-GB" altLang="fr-FR" dirty="0"/>
+              <a:t> sous </a:t>
+            </a:r>
+            <a:r>
+              <a:rPr lang="en-GB" altLang="fr-FR" dirty="0" err="1"/>
+              <a:t>forme</a:t>
+            </a:r>
+            <a:r>
+              <a:rPr lang="en-GB" altLang="fr-FR" dirty="0"/>
+              <a:t> de </a:t>
+            </a:r>
+            <a:r>
+              <a:rPr lang="en-GB" altLang="fr-FR" dirty="0" err="1"/>
+              <a:t>chaîne</a:t>
+            </a:r>
+            <a:r>
+              <a:rPr lang="en-GB" altLang="fr-FR" dirty="0"/>
+              <a:t> de </a:t>
+            </a:r>
+            <a:r>
+              <a:rPr lang="en-GB" altLang="fr-FR" dirty="0" err="1"/>
+              <a:t>caractères</a:t>
+            </a:r>
+            <a:endParaRPr lang="en-GB" altLang="fr-FR" dirty="0"/>
+          </a:p>
+          <a:p>
+            <a:r>
+              <a:rPr lang="en-GB" altLang="fr-FR" dirty="0"/>
+              <a:t>Ce </a:t>
+            </a:r>
+            <a:r>
+              <a:rPr lang="en-GB" altLang="fr-FR" dirty="0" err="1"/>
+              <a:t>processus</a:t>
+            </a:r>
+            <a:r>
+              <a:rPr lang="en-GB" altLang="fr-FR" dirty="0"/>
+              <a:t> </a:t>
+            </a:r>
+            <a:r>
+              <a:rPr lang="en-GB" altLang="fr-FR" dirty="0" err="1"/>
+              <a:t>s'appelle</a:t>
+            </a:r>
+            <a:r>
+              <a:rPr lang="en-GB" altLang="fr-FR" dirty="0"/>
+              <a:t> </a:t>
+            </a:r>
+            <a:r>
+              <a:rPr lang="en-GB" altLang="fr-FR" b="1" dirty="0"/>
+              <a:t>pickling</a:t>
+            </a:r>
+            <a:endParaRPr lang="en-GB" altLang="fr-FR" dirty="0"/>
+          </a:p>
+          <a:p>
+            <a:r>
+              <a:rPr lang="en-GB" altLang="fr-FR" dirty="0" err="1"/>
+              <a:t>Reconstruire</a:t>
+            </a:r>
+            <a:r>
+              <a:rPr lang="en-GB" altLang="fr-FR" dirty="0"/>
+              <a:t> </a:t>
+            </a:r>
+            <a:r>
+              <a:rPr lang="en-GB" altLang="fr-FR" dirty="0" err="1"/>
+              <a:t>l'objet</a:t>
+            </a:r>
+            <a:r>
+              <a:rPr lang="en-GB" altLang="fr-FR" dirty="0"/>
+              <a:t> à </a:t>
+            </a:r>
+            <a:r>
+              <a:rPr lang="en-GB" altLang="fr-FR" dirty="0" err="1"/>
+              <a:t>partir</a:t>
+            </a:r>
+            <a:r>
+              <a:rPr lang="en-GB" altLang="fr-FR" dirty="0"/>
+              <a:t> de </a:t>
+            </a:r>
+            <a:r>
+              <a:rPr lang="en-GB" altLang="fr-FR" dirty="0" err="1"/>
+              <a:t>sa</a:t>
+            </a:r>
+            <a:r>
+              <a:rPr lang="en-GB" altLang="fr-FR" dirty="0"/>
+              <a:t> </a:t>
+            </a:r>
+            <a:r>
+              <a:rPr lang="en-GB" altLang="fr-FR" dirty="0" err="1"/>
+              <a:t>représentation</a:t>
+            </a:r>
+            <a:r>
+              <a:rPr lang="en-GB" altLang="fr-FR" dirty="0"/>
+              <a:t> </a:t>
+            </a:r>
+            <a:r>
+              <a:rPr lang="en-GB" altLang="fr-FR" dirty="0" err="1"/>
+              <a:t>en</a:t>
+            </a:r>
+            <a:r>
+              <a:rPr lang="en-GB" altLang="fr-FR" dirty="0"/>
+              <a:t> </a:t>
+            </a:r>
+            <a:r>
+              <a:rPr lang="en-GB" altLang="fr-FR" dirty="0" err="1"/>
+              <a:t>chaîne</a:t>
+            </a:r>
+            <a:r>
+              <a:rPr lang="en-GB" altLang="fr-FR" dirty="0"/>
+              <a:t> de </a:t>
+            </a:r>
+            <a:r>
+              <a:rPr lang="en-GB" altLang="fr-FR" dirty="0" err="1"/>
+              <a:t>caractères</a:t>
+            </a:r>
+            <a:r>
+              <a:rPr lang="en-GB" altLang="fr-FR" dirty="0"/>
+              <a:t> </a:t>
+            </a:r>
+            <a:r>
+              <a:rPr lang="en-GB" altLang="fr-FR" dirty="0" err="1"/>
+              <a:t>s'appelle</a:t>
+            </a:r>
+            <a:r>
+              <a:rPr lang="en-GB" altLang="fr-FR" dirty="0"/>
+              <a:t> </a:t>
+            </a:r>
+            <a:r>
+              <a:rPr lang="en-GB" altLang="fr-FR" b="1" dirty="0" err="1"/>
+              <a:t>unpickling</a:t>
+            </a:r>
+            <a:endParaRPr lang="en-GB" altLang="fr-FR" dirty="0"/>
           </a:p>
           <a:p>
             <a:pPr lvl="1"/>
             <a:r>
-              <a:rPr lang="fr-FR" dirty="0"/>
-              <a:t>Sérialisation</a:t>
-            </a:r>
-          </a:p>
-          <a:p>
-            <a:pPr lvl="1"/>
-            <a:r>
-              <a:rPr lang="fr-FR" dirty="0" err="1"/>
-              <a:t>Marshalling</a:t>
-            </a:r>
-            <a:endParaRPr lang="fr-FR" dirty="0"/>
-          </a:p>
-          <a:p>
-            <a:r>
-              <a:rPr lang="fr-FR" dirty="0"/>
-              <a:t>Transformation inverse</a:t>
-            </a:r>
-          </a:p>
-          <a:p>
-            <a:pPr lvl="1"/>
-            <a:r>
-              <a:rPr lang="fr-FR" dirty="0" err="1"/>
-              <a:t>Désérialisation</a:t>
-            </a:r>
-            <a:endParaRPr lang="fr-FR" dirty="0"/>
-          </a:p>
-          <a:p>
-            <a:pPr lvl="1"/>
-            <a:r>
-              <a:rPr lang="fr-FR" dirty="0" err="1"/>
-              <a:t>Unmarshalling</a:t>
+              <a:rPr lang="en-GB" altLang="fr-FR" dirty="0"/>
+              <a:t>Entre pickling et </a:t>
+            </a:r>
+            <a:r>
+              <a:rPr lang="en-GB" altLang="fr-FR" dirty="0" err="1"/>
+              <a:t>unpickling</a:t>
+            </a:r>
+            <a:r>
+              <a:rPr lang="en-GB" altLang="fr-FR" dirty="0"/>
+              <a:t>, la </a:t>
+            </a:r>
+            <a:r>
+              <a:rPr lang="en-GB" altLang="fr-FR" dirty="0" err="1"/>
+              <a:t>chaîne</a:t>
+            </a:r>
+            <a:r>
+              <a:rPr lang="en-GB" altLang="fr-FR" dirty="0"/>
+              <a:t> de </a:t>
+            </a:r>
+            <a:r>
+              <a:rPr lang="en-GB" altLang="fr-FR" dirty="0" err="1"/>
+              <a:t>caractères</a:t>
+            </a:r>
+            <a:r>
+              <a:rPr lang="en-GB" altLang="fr-FR" dirty="0"/>
+              <a:t> </a:t>
+            </a:r>
+            <a:r>
+              <a:rPr lang="en-GB" altLang="fr-FR" dirty="0" err="1"/>
+              <a:t>représentant</a:t>
+            </a:r>
+            <a:r>
+              <a:rPr lang="en-GB" altLang="fr-FR" dirty="0"/>
+              <a:t> </a:t>
+            </a:r>
+            <a:r>
+              <a:rPr lang="en-GB" altLang="fr-FR" dirty="0" err="1"/>
+              <a:t>l'objet</a:t>
+            </a:r>
+            <a:r>
+              <a:rPr lang="en-GB" altLang="fr-FR" dirty="0"/>
+              <a:t> a </a:t>
+            </a:r>
+            <a:r>
+              <a:rPr lang="en-GB" altLang="fr-FR" dirty="0" err="1"/>
+              <a:t>pu</a:t>
+            </a:r>
+            <a:r>
+              <a:rPr lang="en-GB" altLang="fr-FR" dirty="0"/>
+              <a:t> </a:t>
+            </a:r>
+            <a:r>
+              <a:rPr lang="en-GB" altLang="fr-FR" dirty="0" err="1"/>
+              <a:t>avoir</a:t>
+            </a:r>
+            <a:r>
+              <a:rPr lang="en-GB" altLang="fr-FR" dirty="0"/>
+              <a:t> </a:t>
+            </a:r>
+            <a:r>
+              <a:rPr lang="en-GB" altLang="fr-FR" dirty="0" err="1"/>
+              <a:t>été</a:t>
+            </a:r>
+            <a:r>
+              <a:rPr lang="en-GB" altLang="fr-FR" dirty="0"/>
+              <a:t> </a:t>
+            </a:r>
+            <a:r>
+              <a:rPr lang="en-GB" altLang="fr-FR" dirty="0" err="1"/>
+              <a:t>enregistrée</a:t>
+            </a:r>
+            <a:r>
+              <a:rPr lang="en-GB" altLang="fr-FR" dirty="0"/>
+              <a:t> </a:t>
+            </a:r>
+            <a:r>
+              <a:rPr lang="en-GB" altLang="fr-FR" dirty="0" err="1"/>
+              <a:t>dans</a:t>
+            </a:r>
+            <a:r>
+              <a:rPr lang="en-GB" altLang="fr-FR" dirty="0"/>
+              <a:t> un </a:t>
+            </a:r>
+            <a:r>
+              <a:rPr lang="en-GB" altLang="fr-FR" dirty="0" err="1"/>
+              <a:t>fichier</a:t>
+            </a:r>
+            <a:r>
+              <a:rPr lang="en-GB" altLang="fr-FR" dirty="0"/>
+              <a:t>, </a:t>
+            </a:r>
+            <a:r>
+              <a:rPr lang="en-GB" altLang="fr-FR" dirty="0" err="1"/>
+              <a:t>ou</a:t>
+            </a:r>
+            <a:r>
+              <a:rPr lang="en-GB" altLang="fr-FR" dirty="0"/>
+              <a:t> </a:t>
+            </a:r>
+            <a:r>
+              <a:rPr lang="en-GB" altLang="fr-FR" dirty="0" err="1"/>
+              <a:t>avoir</a:t>
+            </a:r>
+            <a:r>
+              <a:rPr lang="en-GB" altLang="fr-FR" dirty="0"/>
+              <a:t> </a:t>
+            </a:r>
+            <a:r>
+              <a:rPr lang="en-GB" altLang="fr-FR" dirty="0" err="1"/>
+              <a:t>été</a:t>
+            </a:r>
+            <a:r>
+              <a:rPr lang="en-GB" altLang="fr-FR" dirty="0"/>
+              <a:t> </a:t>
+            </a:r>
+            <a:r>
+              <a:rPr lang="en-GB" altLang="fr-FR" dirty="0" err="1"/>
+              <a:t>envoyée</a:t>
+            </a:r>
+            <a:r>
+              <a:rPr lang="en-GB" altLang="fr-FR" dirty="0"/>
+              <a:t> à </a:t>
+            </a:r>
+            <a:r>
+              <a:rPr lang="en-GB" altLang="fr-FR" dirty="0" err="1"/>
+              <a:t>une</a:t>
+            </a:r>
+            <a:r>
+              <a:rPr lang="en-GB" altLang="fr-FR" dirty="0"/>
+              <a:t> machine </a:t>
+            </a:r>
+            <a:r>
+              <a:rPr lang="en-GB" altLang="fr-FR" dirty="0" err="1"/>
+              <a:t>éloignée</a:t>
+            </a:r>
+            <a:r>
+              <a:rPr lang="en-GB" altLang="fr-FR" dirty="0"/>
+              <a:t> via </a:t>
+            </a:r>
+            <a:r>
+              <a:rPr lang="en-GB" altLang="fr-FR" dirty="0" err="1"/>
+              <a:t>une</a:t>
+            </a:r>
+            <a:r>
+              <a:rPr lang="en-GB" altLang="fr-FR" dirty="0"/>
+              <a:t> connexion </a:t>
+            </a:r>
+            <a:r>
+              <a:rPr lang="en-GB" altLang="fr-FR" dirty="0" err="1"/>
+              <a:t>réseau</a:t>
             </a:r>
             <a:endParaRPr lang="fr-FR" dirty="0"/>
           </a:p>
@@ -4025,7 +4332,7 @@
     </p:spTree>
     <p:extLst>
       <p:ext uri="{BB962C8B-B14F-4D97-AF65-F5344CB8AC3E}">
-        <p14:creationId xmlns:p14="http://schemas.microsoft.com/office/powerpoint/2010/main" val="131513215"/>
+        <p14:creationId xmlns:p14="http://schemas.microsoft.com/office/powerpoint/2010/main" val="321937878"/>
       </p:ext>
     </p:extLst>
   </p:cSld>
@@ -4091,448 +4398,6 @@
           <a:lstStyle/>
           <a:p>
             <a:r>
-              <a:rPr lang="en-GB" altLang="fr-FR" dirty="0" err="1"/>
-              <a:t>C'est</a:t>
-            </a:r>
-            <a:r>
-              <a:rPr lang="en-GB" altLang="fr-FR" dirty="0"/>
-              <a:t> un module </a:t>
-            </a:r>
-            <a:r>
-              <a:rPr lang="en-GB" altLang="fr-FR" dirty="0" err="1"/>
-              <a:t>étonnant</a:t>
-            </a:r>
-            <a:r>
-              <a:rPr lang="en-GB" altLang="fr-FR" dirty="0"/>
-              <a:t> qui </a:t>
-            </a:r>
-            <a:r>
-              <a:rPr lang="en-GB" altLang="fr-FR" dirty="0" err="1"/>
-              <a:t>peut</a:t>
-            </a:r>
-            <a:r>
-              <a:rPr lang="en-GB" altLang="fr-FR" dirty="0"/>
-              <a:t> </a:t>
-            </a:r>
-            <a:r>
-              <a:rPr lang="en-GB" altLang="fr-FR" dirty="0" err="1"/>
-              <a:t>prendre</a:t>
-            </a:r>
-            <a:r>
-              <a:rPr lang="en-GB" altLang="fr-FR" dirty="0"/>
-              <a:t> </a:t>
-            </a:r>
-            <a:r>
-              <a:rPr lang="en-GB" altLang="fr-FR" dirty="0" err="1"/>
-              <a:t>presque</a:t>
-            </a:r>
-            <a:r>
-              <a:rPr lang="en-GB" altLang="fr-FR" dirty="0"/>
-              <a:t> </a:t>
-            </a:r>
-            <a:r>
-              <a:rPr lang="en-GB" altLang="fr-FR" dirty="0" err="1"/>
-              <a:t>n'importe</a:t>
-            </a:r>
-            <a:r>
-              <a:rPr lang="en-GB" altLang="fr-FR" dirty="0"/>
-              <a:t> </a:t>
-            </a:r>
-            <a:r>
-              <a:rPr lang="en-GB" altLang="fr-FR" dirty="0" err="1"/>
-              <a:t>quel</a:t>
-            </a:r>
-            <a:r>
-              <a:rPr lang="en-GB" altLang="fr-FR" dirty="0"/>
-              <a:t> objet Python, et le </a:t>
-            </a:r>
-            <a:r>
-              <a:rPr lang="en-GB" altLang="fr-FR" dirty="0" err="1"/>
-              <a:t>convertir</a:t>
-            </a:r>
-            <a:r>
-              <a:rPr lang="en-GB" altLang="fr-FR" dirty="0"/>
-              <a:t> </a:t>
-            </a:r>
-            <a:r>
-              <a:rPr lang="en-GB" altLang="fr-FR" dirty="0" err="1"/>
-              <a:t>en</a:t>
-            </a:r>
-            <a:r>
-              <a:rPr lang="en-GB" altLang="fr-FR" dirty="0"/>
-              <a:t> </a:t>
-            </a:r>
-            <a:r>
-              <a:rPr lang="en-GB" altLang="fr-FR" dirty="0" err="1"/>
-              <a:t>une</a:t>
-            </a:r>
-            <a:r>
-              <a:rPr lang="en-GB" altLang="fr-FR" dirty="0"/>
-              <a:t> </a:t>
-            </a:r>
-            <a:r>
-              <a:rPr lang="en-GB" altLang="fr-FR" dirty="0" err="1"/>
-              <a:t>représentation</a:t>
-            </a:r>
-            <a:r>
-              <a:rPr lang="en-GB" altLang="fr-FR" dirty="0"/>
-              <a:t> sous </a:t>
-            </a:r>
-            <a:r>
-              <a:rPr lang="en-GB" altLang="fr-FR" dirty="0" err="1"/>
-              <a:t>forme</a:t>
-            </a:r>
-            <a:r>
-              <a:rPr lang="en-GB" altLang="fr-FR" dirty="0"/>
-              <a:t> de </a:t>
-            </a:r>
-            <a:r>
-              <a:rPr lang="en-GB" altLang="fr-FR" dirty="0" err="1"/>
-              <a:t>chaîne</a:t>
-            </a:r>
-            <a:r>
-              <a:rPr lang="en-GB" altLang="fr-FR" dirty="0"/>
-              <a:t> de </a:t>
-            </a:r>
-            <a:r>
-              <a:rPr lang="en-GB" altLang="fr-FR" dirty="0" err="1"/>
-              <a:t>caractères</a:t>
-            </a:r>
-            <a:endParaRPr lang="en-GB" altLang="fr-FR" dirty="0"/>
-          </a:p>
-          <a:p>
-            <a:r>
-              <a:rPr lang="en-GB" altLang="fr-FR" dirty="0"/>
-              <a:t>Ce </a:t>
-            </a:r>
-            <a:r>
-              <a:rPr lang="en-GB" altLang="fr-FR" dirty="0" err="1"/>
-              <a:t>processus</a:t>
-            </a:r>
-            <a:r>
-              <a:rPr lang="en-GB" altLang="fr-FR" dirty="0"/>
-              <a:t> </a:t>
-            </a:r>
-            <a:r>
-              <a:rPr lang="en-GB" altLang="fr-FR" dirty="0" err="1"/>
-              <a:t>s'appelle</a:t>
-            </a:r>
-            <a:r>
-              <a:rPr lang="en-GB" altLang="fr-FR" dirty="0"/>
-              <a:t> </a:t>
-            </a:r>
-            <a:r>
-              <a:rPr lang="en-GB" altLang="fr-FR" b="1" dirty="0"/>
-              <a:t>pickling</a:t>
-            </a:r>
-            <a:endParaRPr lang="en-GB" altLang="fr-FR" dirty="0"/>
-          </a:p>
-          <a:p>
-            <a:r>
-              <a:rPr lang="en-GB" altLang="fr-FR" dirty="0" err="1"/>
-              <a:t>Reconstruire</a:t>
-            </a:r>
-            <a:r>
-              <a:rPr lang="en-GB" altLang="fr-FR" dirty="0"/>
-              <a:t> </a:t>
-            </a:r>
-            <a:r>
-              <a:rPr lang="en-GB" altLang="fr-FR" dirty="0" err="1"/>
-              <a:t>l'objet</a:t>
-            </a:r>
-            <a:r>
-              <a:rPr lang="en-GB" altLang="fr-FR" dirty="0"/>
-              <a:t> à </a:t>
-            </a:r>
-            <a:r>
-              <a:rPr lang="en-GB" altLang="fr-FR" dirty="0" err="1"/>
-              <a:t>partir</a:t>
-            </a:r>
-            <a:r>
-              <a:rPr lang="en-GB" altLang="fr-FR" dirty="0"/>
-              <a:t> de </a:t>
-            </a:r>
-            <a:r>
-              <a:rPr lang="en-GB" altLang="fr-FR" dirty="0" err="1"/>
-              <a:t>sa</a:t>
-            </a:r>
-            <a:r>
-              <a:rPr lang="en-GB" altLang="fr-FR" dirty="0"/>
-              <a:t> </a:t>
-            </a:r>
-            <a:r>
-              <a:rPr lang="en-GB" altLang="fr-FR" dirty="0" err="1"/>
-              <a:t>représentation</a:t>
-            </a:r>
-            <a:r>
-              <a:rPr lang="en-GB" altLang="fr-FR" dirty="0"/>
-              <a:t> </a:t>
-            </a:r>
-            <a:r>
-              <a:rPr lang="en-GB" altLang="fr-FR" dirty="0" err="1"/>
-              <a:t>en</a:t>
-            </a:r>
-            <a:r>
-              <a:rPr lang="en-GB" altLang="fr-FR" dirty="0"/>
-              <a:t> </a:t>
-            </a:r>
-            <a:r>
-              <a:rPr lang="en-GB" altLang="fr-FR" dirty="0" err="1"/>
-              <a:t>chaîne</a:t>
-            </a:r>
-            <a:r>
-              <a:rPr lang="en-GB" altLang="fr-FR" dirty="0"/>
-              <a:t> de </a:t>
-            </a:r>
-            <a:r>
-              <a:rPr lang="en-GB" altLang="fr-FR" dirty="0" err="1"/>
-              <a:t>caractères</a:t>
-            </a:r>
-            <a:r>
-              <a:rPr lang="en-GB" altLang="fr-FR" dirty="0"/>
-              <a:t> </a:t>
-            </a:r>
-            <a:r>
-              <a:rPr lang="en-GB" altLang="fr-FR" dirty="0" err="1"/>
-              <a:t>s'appelle</a:t>
-            </a:r>
-            <a:r>
-              <a:rPr lang="en-GB" altLang="fr-FR" dirty="0"/>
-              <a:t> </a:t>
-            </a:r>
-            <a:r>
-              <a:rPr lang="en-GB" altLang="fr-FR" b="1" dirty="0" err="1"/>
-              <a:t>unpickling</a:t>
-            </a:r>
-            <a:endParaRPr lang="en-GB" altLang="fr-FR" dirty="0"/>
-          </a:p>
-          <a:p>
-            <a:pPr lvl="1"/>
-            <a:r>
-              <a:rPr lang="en-GB" altLang="fr-FR" dirty="0"/>
-              <a:t>Entre pickling et </a:t>
-            </a:r>
-            <a:r>
-              <a:rPr lang="en-GB" altLang="fr-FR" dirty="0" err="1"/>
-              <a:t>unpickling</a:t>
-            </a:r>
-            <a:r>
-              <a:rPr lang="en-GB" altLang="fr-FR" dirty="0"/>
-              <a:t>, la </a:t>
-            </a:r>
-            <a:r>
-              <a:rPr lang="en-GB" altLang="fr-FR" dirty="0" err="1"/>
-              <a:t>chaîne</a:t>
-            </a:r>
-            <a:r>
-              <a:rPr lang="en-GB" altLang="fr-FR" dirty="0"/>
-              <a:t> de </a:t>
-            </a:r>
-            <a:r>
-              <a:rPr lang="en-GB" altLang="fr-FR" dirty="0" err="1"/>
-              <a:t>caractères</a:t>
-            </a:r>
-            <a:r>
-              <a:rPr lang="en-GB" altLang="fr-FR" dirty="0"/>
-              <a:t> </a:t>
-            </a:r>
-            <a:r>
-              <a:rPr lang="en-GB" altLang="fr-FR" dirty="0" err="1"/>
-              <a:t>représentant</a:t>
-            </a:r>
-            <a:r>
-              <a:rPr lang="en-GB" altLang="fr-FR" dirty="0"/>
-              <a:t> </a:t>
-            </a:r>
-            <a:r>
-              <a:rPr lang="en-GB" altLang="fr-FR" dirty="0" err="1"/>
-              <a:t>l'objet</a:t>
-            </a:r>
-            <a:r>
-              <a:rPr lang="en-GB" altLang="fr-FR" dirty="0"/>
-              <a:t> a </a:t>
-            </a:r>
-            <a:r>
-              <a:rPr lang="en-GB" altLang="fr-FR" dirty="0" err="1"/>
-              <a:t>pu</a:t>
-            </a:r>
-            <a:r>
-              <a:rPr lang="en-GB" altLang="fr-FR" dirty="0"/>
-              <a:t> </a:t>
-            </a:r>
-            <a:r>
-              <a:rPr lang="en-GB" altLang="fr-FR" dirty="0" err="1"/>
-              <a:t>avoir</a:t>
-            </a:r>
-            <a:r>
-              <a:rPr lang="en-GB" altLang="fr-FR" dirty="0"/>
-              <a:t> </a:t>
-            </a:r>
-            <a:r>
-              <a:rPr lang="en-GB" altLang="fr-FR" dirty="0" err="1"/>
-              <a:t>été</a:t>
-            </a:r>
-            <a:r>
-              <a:rPr lang="en-GB" altLang="fr-FR" dirty="0"/>
-              <a:t> </a:t>
-            </a:r>
-            <a:r>
-              <a:rPr lang="en-GB" altLang="fr-FR" dirty="0" err="1"/>
-              <a:t>enregistrée</a:t>
-            </a:r>
-            <a:r>
-              <a:rPr lang="en-GB" altLang="fr-FR" dirty="0"/>
-              <a:t> </a:t>
-            </a:r>
-            <a:r>
-              <a:rPr lang="en-GB" altLang="fr-FR" dirty="0" err="1"/>
-              <a:t>dans</a:t>
-            </a:r>
-            <a:r>
-              <a:rPr lang="en-GB" altLang="fr-FR" dirty="0"/>
-              <a:t> un </a:t>
-            </a:r>
-            <a:r>
-              <a:rPr lang="en-GB" altLang="fr-FR" dirty="0" err="1"/>
-              <a:t>fichier</a:t>
-            </a:r>
-            <a:r>
-              <a:rPr lang="en-GB" altLang="fr-FR" dirty="0"/>
-              <a:t>, </a:t>
-            </a:r>
-            <a:r>
-              <a:rPr lang="en-GB" altLang="fr-FR" dirty="0" err="1"/>
-              <a:t>ou</a:t>
-            </a:r>
-            <a:r>
-              <a:rPr lang="en-GB" altLang="fr-FR" dirty="0"/>
-              <a:t> </a:t>
-            </a:r>
-            <a:r>
-              <a:rPr lang="en-GB" altLang="fr-FR" dirty="0" err="1"/>
-              <a:t>avoir</a:t>
-            </a:r>
-            <a:r>
-              <a:rPr lang="en-GB" altLang="fr-FR" dirty="0"/>
-              <a:t> </a:t>
-            </a:r>
-            <a:r>
-              <a:rPr lang="en-GB" altLang="fr-FR" dirty="0" err="1"/>
-              <a:t>été</a:t>
-            </a:r>
-            <a:r>
-              <a:rPr lang="en-GB" altLang="fr-FR" dirty="0"/>
-              <a:t> </a:t>
-            </a:r>
-            <a:r>
-              <a:rPr lang="en-GB" altLang="fr-FR" dirty="0" err="1"/>
-              <a:t>envoyée</a:t>
-            </a:r>
-            <a:r>
-              <a:rPr lang="en-GB" altLang="fr-FR" dirty="0"/>
-              <a:t> à </a:t>
-            </a:r>
-            <a:r>
-              <a:rPr lang="en-GB" altLang="fr-FR" dirty="0" err="1"/>
-              <a:t>une</a:t>
-            </a:r>
-            <a:r>
-              <a:rPr lang="en-GB" altLang="fr-FR" dirty="0"/>
-              <a:t> machine </a:t>
-            </a:r>
-            <a:r>
-              <a:rPr lang="en-GB" altLang="fr-FR" dirty="0" err="1"/>
-              <a:t>éloignée</a:t>
-            </a:r>
-            <a:r>
-              <a:rPr lang="en-GB" altLang="fr-FR" dirty="0"/>
-              <a:t> via </a:t>
-            </a:r>
-            <a:r>
-              <a:rPr lang="en-GB" altLang="fr-FR" dirty="0" err="1"/>
-              <a:t>une</a:t>
-            </a:r>
-            <a:r>
-              <a:rPr lang="en-GB" altLang="fr-FR" dirty="0"/>
-              <a:t> connexion </a:t>
-            </a:r>
-            <a:r>
-              <a:rPr lang="en-GB" altLang="fr-FR" dirty="0" err="1"/>
-              <a:t>réseau</a:t>
-            </a:r>
-            <a:endParaRPr lang="fr-FR" dirty="0"/>
-          </a:p>
-        </p:txBody>
-      </p:sp>
-    </p:spTree>
-    <p:extLst>
-      <p:ext uri="{BB962C8B-B14F-4D97-AF65-F5344CB8AC3E}">
-        <p14:creationId xmlns:p14="http://schemas.microsoft.com/office/powerpoint/2010/main" val="321937878"/>
-      </p:ext>
-    </p:extLst>
-  </p:cSld>
-  <p:clrMapOvr>
-    <a:masterClrMapping/>
-  </p:clrMapOvr>
-</p:sld>
-</file>
-
-<file path=ppt/slides/slide13.xml><?xml version="1.0" encoding="utf-8"?>
-<p:sld xmlns:a="http://schemas.openxmlformats.org/drawingml/2006/main" xmlns:r="http://schemas.openxmlformats.org/officeDocument/2006/relationships" xmlns:p="http://schemas.openxmlformats.org/presentationml/2006/main">
-  <p:cSld>
-    <p:spTree>
-      <p:nvGrpSpPr>
-        <p:cNvPr id="1" name=""/>
-        <p:cNvGrpSpPr/>
-        <p:nvPr/>
-      </p:nvGrpSpPr>
-      <p:grpSpPr>
-        <a:xfrm>
-          <a:off x="0" y="0"/>
-          <a:ext cx="0" cy="0"/>
-          <a:chOff x="0" y="0"/>
-          <a:chExt cx="0" cy="0"/>
-        </a:xfrm>
-      </p:grpSpPr>
-      <p:sp>
-        <p:nvSpPr>
-          <p:cNvPr id="2" name="Titre 1"/>
-          <p:cNvSpPr>
-            <a:spLocks noGrp="1"/>
-          </p:cNvSpPr>
-          <p:nvPr>
-            <p:ph type="title"/>
-          </p:nvPr>
-        </p:nvSpPr>
-        <p:spPr/>
-        <p:txBody>
-          <a:bodyPr/>
-          <a:lstStyle/>
-          <a:p>
-            <a:r>
-              <a:rPr lang="fr-FR" dirty="0" err="1"/>
-              <a:t>Pickle</a:t>
-            </a:r>
-            <a:endParaRPr lang="fr-FR" dirty="0"/>
-          </a:p>
-        </p:txBody>
-      </p:sp>
-      <p:sp>
-        <p:nvSpPr>
-          <p:cNvPr id="3" name="Espace réservé du contenu 2"/>
-          <p:cNvSpPr>
-            <a:spLocks noGrp="1"/>
-          </p:cNvSpPr>
-          <p:nvPr>
-            <p:ph idx="1"/>
-          </p:nvPr>
-        </p:nvSpPr>
-        <p:spPr/>
-        <p:txBody>
-          <a:bodyPr/>
-          <a:lstStyle/>
-          <a:p>
-            <a:r>
               <a:rPr lang="fr-FR" dirty="0"/>
               <a:t>Si vous avez un objet x, et un objet fichier f ouvert en écriture, la voie la plus simple de ``</a:t>
             </a:r>
@@ -4603,7 +4468,7 @@
 </p:sld>
 </file>
 
-<file path=ppt/slides/slide14.xml><?xml version="1.0" encoding="utf-8"?>
+<file path=ppt/slides/slide13.xml><?xml version="1.0" encoding="utf-8"?>
 <p:sld xmlns:a="http://schemas.openxmlformats.org/drawingml/2006/main" xmlns:r="http://schemas.openxmlformats.org/officeDocument/2006/relationships" xmlns:p="http://schemas.openxmlformats.org/presentationml/2006/main">
   <p:cSld>
     <p:spTree>
@@ -4775,7 +4640,7 @@
 </p:sld>
 </file>
 
-<file path=ppt/slides/slide15.xml><?xml version="1.0" encoding="utf-8"?>
+<file path=ppt/slides/slide14.xml><?xml version="1.0" encoding="utf-8"?>
 <p:sld xmlns:a="http://schemas.openxmlformats.org/drawingml/2006/main" xmlns:r="http://schemas.openxmlformats.org/officeDocument/2006/relationships" xmlns:p="http://schemas.openxmlformats.org/presentationml/2006/main">
   <p:cSld>
     <p:spTree>
@@ -4873,7 +4738,7 @@
 </p:sld>
 </file>
 
-<file path=ppt/slides/slide16.xml><?xml version="1.0" encoding="utf-8"?>
+<file path=ppt/slides/slide15.xml><?xml version="1.0" encoding="utf-8"?>
 <p:sld xmlns:a="http://schemas.openxmlformats.org/drawingml/2006/main" xmlns:r="http://schemas.openxmlformats.org/officeDocument/2006/relationships" xmlns:p="http://schemas.openxmlformats.org/presentationml/2006/main">
   <p:cSld>
     <p:spTree>
@@ -4968,7 +4833,7 @@
 </p:sld>
 </file>
 
-<file path=ppt/slides/slide17.xml><?xml version="1.0" encoding="utf-8"?>
+<file path=ppt/slides/slide16.xml><?xml version="1.0" encoding="utf-8"?>
 <p:sld xmlns:a="http://schemas.openxmlformats.org/drawingml/2006/main" xmlns:r="http://schemas.openxmlformats.org/officeDocument/2006/relationships" xmlns:p="http://schemas.openxmlformats.org/presentationml/2006/main">
   <p:cSld>
     <p:spTree>
@@ -5304,7 +5169,7 @@
 </p:sld>
 </file>
 
-<file path=ppt/slides/slide18.xml><?xml version="1.0" encoding="utf-8"?>
+<file path=ppt/slides/slide17.xml><?xml version="1.0" encoding="utf-8"?>
 <p:sld xmlns:a="http://schemas.openxmlformats.org/drawingml/2006/main" xmlns:r="http://schemas.openxmlformats.org/officeDocument/2006/relationships" xmlns:p="http://schemas.openxmlformats.org/presentationml/2006/main">
   <p:cSld>
     <p:spTree>
@@ -5396,7 +5261,7 @@
 </p:sld>
 </file>
 
-<file path=ppt/slides/slide19.xml><?xml version="1.0" encoding="utf-8"?>
+<file path=ppt/slides/slide18.xml><?xml version="1.0" encoding="utf-8"?>
 <p:sld xmlns:a="http://schemas.openxmlformats.org/drawingml/2006/main" xmlns:r="http://schemas.openxmlformats.org/officeDocument/2006/relationships" xmlns:p="http://schemas.openxmlformats.org/presentationml/2006/main">
   <p:cSld>
     <p:spTree>
@@ -5571,8 +5436,12 @@
           <a:lstStyle/>
           <a:p>
             <a:r>
-              <a:rPr lang="fr-FR" dirty="0"/>
-              <a:t>Autres modèles</a:t>
+              <a:rPr lang="fr-FR" dirty="0" err="1"/>
+              <a:t>Random</a:t>
+            </a:r>
+            <a:r>
+              <a:rPr lang="fr-FR" dirty="0"/>
+              <a:t> Forest</a:t>
             </a:r>
           </a:p>
         </p:txBody>
@@ -5594,29 +5463,37 @@
           <a:p>
             <a:r>
               <a:rPr lang="fr-FR" dirty="0"/>
-              <a:t>Il existe de nombreux autres modèles de classification</a:t>
-            </a:r>
-          </a:p>
-          <a:p>
-            <a:pPr lvl="1"/>
+              <a:t>Les forêts d'arbres décisionnels ont été formellement proposées en 2001 par Leo </a:t>
+            </a:r>
             <a:r>
               <a:rPr lang="fr-FR" dirty="0" err="1"/>
-              <a:t>RandomForest</a:t>
+              <a:t>Breiman</a:t>
+            </a:r>
+            <a:r>
+              <a:rPr lang="fr-FR" dirty="0"/>
+              <a:t> et Adèle </a:t>
+            </a:r>
+            <a:r>
+              <a:rPr lang="fr-FR" dirty="0" err="1"/>
+              <a:t>Cutler</a:t>
             </a:r>
             <a:endParaRPr lang="fr-FR" dirty="0"/>
           </a:p>
           <a:p>
-            <a:pPr lvl="1"/>
-            <a:r>
-              <a:rPr lang="fr-FR" dirty="0"/>
-              <a:t>SVM</a:t>
-            </a:r>
-          </a:p>
-          <a:p>
-            <a:pPr lvl="1"/>
-            <a:r>
-              <a:rPr lang="fr-FR" dirty="0"/>
-              <a:t>…</a:t>
+            <a:r>
+              <a:rPr lang="fr-FR" dirty="0"/>
+              <a:t>Cet algorithme combine les concepts de sous-espaces aléatoires et de </a:t>
+            </a:r>
+            <a:r>
+              <a:rPr lang="fr-FR" dirty="0" err="1"/>
+              <a:t>bagging</a:t>
+            </a:r>
+            <a:endParaRPr lang="fr-FR" dirty="0"/>
+          </a:p>
+          <a:p>
+            <a:r>
+              <a:rPr lang="fr-FR" dirty="0"/>
+              <a:t>L'algorithme des forêts d'arbres décisionnels effectue un apprentissage sur de multiples arbres de décision entraînés sur des sous-ensembles de données légèrement différents</a:t>
             </a:r>
           </a:p>
         </p:txBody>
@@ -5624,7 +5501,7 @@
     </p:spTree>
     <p:extLst>
       <p:ext uri="{BB962C8B-B14F-4D97-AF65-F5344CB8AC3E}">
-        <p14:creationId xmlns:p14="http://schemas.microsoft.com/office/powerpoint/2010/main" val="889605795"/>
+        <p14:creationId xmlns:p14="http://schemas.microsoft.com/office/powerpoint/2010/main" val="3428597560"/>
       </p:ext>
     </p:extLst>
   </p:cSld>
@@ -5692,114 +5569,6 @@
           <a:bodyPr/>
           <a:lstStyle/>
           <a:p>
-            <a:r>
-              <a:rPr lang="fr-FR" dirty="0"/>
-              <a:t>Les forêts d'arbres décisionnels ont été formellement proposées en 2001 par Leo </a:t>
-            </a:r>
-            <a:r>
-              <a:rPr lang="fr-FR" dirty="0" err="1"/>
-              <a:t>Breiman</a:t>
-            </a:r>
-            <a:r>
-              <a:rPr lang="fr-FR" dirty="0"/>
-              <a:t> et Adèle </a:t>
-            </a:r>
-            <a:r>
-              <a:rPr lang="fr-FR" dirty="0" err="1"/>
-              <a:t>Cutler</a:t>
-            </a:r>
-            <a:endParaRPr lang="fr-FR" dirty="0"/>
-          </a:p>
-          <a:p>
-            <a:r>
-              <a:rPr lang="fr-FR" dirty="0"/>
-              <a:t>Cet algorithme combine les concepts de sous-espaces aléatoires et de </a:t>
-            </a:r>
-            <a:r>
-              <a:rPr lang="fr-FR" dirty="0" err="1"/>
-              <a:t>bagging</a:t>
-            </a:r>
-            <a:endParaRPr lang="fr-FR" dirty="0"/>
-          </a:p>
-          <a:p>
-            <a:r>
-              <a:rPr lang="fr-FR" dirty="0"/>
-              <a:t>L'algorithme des forêts d'arbres décisionnels effectue un apprentissage sur de multiples arbres de décision entraînés sur des sous-ensembles de données légèrement différents</a:t>
-            </a:r>
-          </a:p>
-        </p:txBody>
-      </p:sp>
-    </p:spTree>
-    <p:extLst>
-      <p:ext uri="{BB962C8B-B14F-4D97-AF65-F5344CB8AC3E}">
-        <p14:creationId xmlns:p14="http://schemas.microsoft.com/office/powerpoint/2010/main" val="3428597560"/>
-      </p:ext>
-    </p:extLst>
-  </p:cSld>
-  <p:clrMapOvr>
-    <a:masterClrMapping/>
-  </p:clrMapOvr>
-</p:sld>
-</file>
-
-<file path=ppt/slides/slide4.xml><?xml version="1.0" encoding="utf-8"?>
-<p:sld xmlns:a="http://schemas.openxmlformats.org/drawingml/2006/main" xmlns:r="http://schemas.openxmlformats.org/officeDocument/2006/relationships" xmlns:p="http://schemas.openxmlformats.org/presentationml/2006/main">
-  <p:cSld>
-    <p:spTree>
-      <p:nvGrpSpPr>
-        <p:cNvPr id="1" name=""/>
-        <p:cNvGrpSpPr/>
-        <p:nvPr/>
-      </p:nvGrpSpPr>
-      <p:grpSpPr>
-        <a:xfrm>
-          <a:off x="0" y="0"/>
-          <a:ext cx="0" cy="0"/>
-          <a:chOff x="0" y="0"/>
-          <a:chExt cx="0" cy="0"/>
-        </a:xfrm>
-      </p:grpSpPr>
-      <p:sp>
-        <p:nvSpPr>
-          <p:cNvPr id="2" name="Titre 1"/>
-          <p:cNvSpPr>
-            <a:spLocks noGrp="1"/>
-          </p:cNvSpPr>
-          <p:nvPr>
-            <p:ph type="title"/>
-          </p:nvPr>
-        </p:nvSpPr>
-        <p:spPr/>
-        <p:txBody>
-          <a:bodyPr/>
-          <a:lstStyle/>
-          <a:p>
-            <a:r>
-              <a:rPr lang="fr-FR" dirty="0" err="1"/>
-              <a:t>Random</a:t>
-            </a:r>
-            <a:r>
-              <a:rPr lang="fr-FR" dirty="0"/>
-              <a:t> Forest</a:t>
-            </a:r>
-          </a:p>
-        </p:txBody>
-      </p:sp>
-      <p:sp>
-        <p:nvSpPr>
-          <p:cNvPr id="3" name="Espace réservé du contenu 2"/>
-          <p:cNvSpPr>
-            <a:spLocks noGrp="1"/>
-          </p:cNvSpPr>
-          <p:nvPr>
-            <p:ph idx="1"/>
-          </p:nvPr>
-        </p:nvSpPr>
-        <p:spPr/>
-        <p:txBody>
-          <a:bodyPr/>
-          <a:lstStyle/>
-          <a:p>
             <a:pPr marL="0" indent="0">
               <a:buNone/>
             </a:pPr>
@@ -5873,7 +5642,7 @@
 </p:sld>
 </file>
 
-<file path=ppt/slides/slide5.xml><?xml version="1.0" encoding="utf-8"?>
+<file path=ppt/slides/slide4.xml><?xml version="1.0" encoding="utf-8"?>
 <p:sld xmlns:a="http://schemas.openxmlformats.org/drawingml/2006/main" xmlns:r="http://schemas.openxmlformats.org/officeDocument/2006/relationships" xmlns:p="http://schemas.openxmlformats.org/presentationml/2006/main">
   <p:cSld>
     <p:spTree>
@@ -5940,61 +5709,109 @@
           </a:p>
         </p:txBody>
       </p:sp>
-      <mc:AlternateContent xmlns:mc="http://schemas.openxmlformats.org/markup-compatibility/2006" xmlns:p14="http://schemas.microsoft.com/office/powerpoint/2010/main">
-        <mc:Choice Requires="p14">
-          <p:contentPart p14:bwMode="auto" r:id="rId2">
-            <p14:nvContentPartPr>
-              <p14:cNvPr id="4" name="Encre 3">
-                <a:extLst>
-                  <a:ext uri="{FF2B5EF4-FFF2-40B4-BE49-F238E27FC236}">
-                    <a16:creationId xmlns:a16="http://schemas.microsoft.com/office/drawing/2014/main" id="{5243CE02-2F1D-A297-7363-012A9F03F5B9}"/>
-                  </a:ext>
-                </a:extLst>
-              </p14:cNvPr>
-              <p14:cNvContentPartPr/>
-              <p14:nvPr/>
-            </p14:nvContentPartPr>
-            <p14:xfrm>
-              <a:off x="2755800" y="368280"/>
-              <a:ext cx="2076840" cy="1010160"/>
-            </p14:xfrm>
-          </p:contentPart>
-        </mc:Choice>
-        <mc:Fallback xmlns="">
-          <p:pic>
-            <p:nvPicPr>
-              <p:cNvPr id="4" name="Encre 3">
-                <a:extLst>
-                  <a:ext uri="{FF2B5EF4-FFF2-40B4-BE49-F238E27FC236}">
-                    <a16:creationId xmlns:a16="http://schemas.microsoft.com/office/drawing/2014/main" id="{5243CE02-2F1D-A297-7363-012A9F03F5B9}"/>
-                  </a:ext>
-                </a:extLst>
-              </p:cNvPr>
-              <p:cNvPicPr/>
-              <p:nvPr/>
-            </p:nvPicPr>
-            <p:blipFill>
-              <a:blip r:embed="rId3"/>
-              <a:stretch>
-                <a:fillRect/>
-              </a:stretch>
-            </p:blipFill>
-            <p:spPr>
-              <a:xfrm>
-                <a:off x="2746440" y="358920"/>
-                <a:ext cx="2095560" cy="1028880"/>
-              </a:xfrm>
-              <a:prstGeom prst="rect">
-                <a:avLst/>
-              </a:prstGeom>
-            </p:spPr>
-          </p:pic>
-        </mc:Fallback>
-      </mc:AlternateContent>
     </p:spTree>
     <p:extLst>
       <p:ext uri="{BB962C8B-B14F-4D97-AF65-F5344CB8AC3E}">
         <p14:creationId xmlns:p14="http://schemas.microsoft.com/office/powerpoint/2010/main" val="3168784124"/>
+      </p:ext>
+    </p:extLst>
+  </p:cSld>
+  <p:clrMapOvr>
+    <a:masterClrMapping/>
+  </p:clrMapOvr>
+</p:sld>
+</file>
+
+<file path=ppt/slides/slide5.xml><?xml version="1.0" encoding="utf-8"?>
+<p:sld xmlns:a="http://schemas.openxmlformats.org/drawingml/2006/main" xmlns:r="http://schemas.openxmlformats.org/officeDocument/2006/relationships" xmlns:p="http://schemas.openxmlformats.org/presentationml/2006/main">
+  <p:cSld>
+    <p:spTree>
+      <p:nvGrpSpPr>
+        <p:cNvPr id="1" name=""/>
+        <p:cNvGrpSpPr/>
+        <p:nvPr/>
+      </p:nvGrpSpPr>
+      <p:grpSpPr>
+        <a:xfrm>
+          <a:off x="0" y="0"/>
+          <a:ext cx="0" cy="0"/>
+          <a:chOff x="0" y="0"/>
+          <a:chExt cx="0" cy="0"/>
+        </a:xfrm>
+      </p:grpSpPr>
+      <p:sp>
+        <p:nvSpPr>
+          <p:cNvPr id="2" name="Titre 1"/>
+          <p:cNvSpPr>
+            <a:spLocks noGrp="1"/>
+          </p:cNvSpPr>
+          <p:nvPr>
+            <p:ph type="title"/>
+          </p:nvPr>
+        </p:nvSpPr>
+        <p:spPr/>
+        <p:txBody>
+          <a:bodyPr/>
+          <a:lstStyle/>
+          <a:p>
+            <a:r>
+              <a:rPr lang="fr-FR" dirty="0"/>
+              <a:t>Asymétrie</a:t>
+            </a:r>
+          </a:p>
+        </p:txBody>
+      </p:sp>
+      <p:sp>
+        <p:nvSpPr>
+          <p:cNvPr id="3" name="Espace réservé du contenu 2"/>
+          <p:cNvSpPr>
+            <a:spLocks noGrp="1"/>
+          </p:cNvSpPr>
+          <p:nvPr>
+            <p:ph idx="1"/>
+          </p:nvPr>
+        </p:nvSpPr>
+        <p:spPr/>
+        <p:txBody>
+          <a:bodyPr/>
+          <a:lstStyle/>
+          <a:p>
+            <a:r>
+              <a:rPr lang="fr-FR" dirty="0" err="1"/>
+              <a:t>Random</a:t>
+            </a:r>
+            <a:r>
+              <a:rPr lang="fr-FR" dirty="0"/>
+              <a:t> Forest est un modèle asymétrique</a:t>
+            </a:r>
+          </a:p>
+          <a:p>
+            <a:pPr lvl="1"/>
+            <a:r>
+              <a:rPr lang="fr-FR" dirty="0"/>
+              <a:t>Apprentissage couteux</a:t>
+            </a:r>
+          </a:p>
+          <a:p>
+            <a:pPr lvl="1"/>
+            <a:r>
+              <a:rPr lang="fr-FR" dirty="0"/>
+              <a:t>Prédiction rapide</a:t>
+            </a:r>
+          </a:p>
+          <a:p>
+            <a:pPr lvl="1"/>
+            <a:r>
+              <a:rPr lang="fr-FR" dirty="0"/>
+              <a:t>Très utile</a:t>
+            </a:r>
+          </a:p>
+        </p:txBody>
+      </p:sp>
+    </p:spTree>
+    <p:extLst>
+      <p:ext uri="{BB962C8B-B14F-4D97-AF65-F5344CB8AC3E}">
+        <p14:creationId xmlns:p14="http://schemas.microsoft.com/office/powerpoint/2010/main" val="847402067"/>
       </p:ext>
     </p:extLst>
   </p:cSld>
@@ -6037,8 +5854,12 @@
           <a:lstStyle/>
           <a:p>
             <a:r>
-              <a:rPr lang="fr-FR" dirty="0"/>
-              <a:t>Asymétrie</a:t>
+              <a:rPr lang="fr-FR" dirty="0" err="1"/>
+              <a:t>Random</a:t>
+            </a:r>
+            <a:r>
+              <a:rPr lang="fr-FR" dirty="0"/>
+              <a:t> Forest</a:t>
             </a:r>
           </a:p>
         </p:txBody>
@@ -6059,109 +5880,6 @@
           <a:lstStyle/>
           <a:p>
             <a:r>
-              <a:rPr lang="fr-FR" dirty="0" err="1"/>
-              <a:t>Random</a:t>
-            </a:r>
-            <a:r>
-              <a:rPr lang="fr-FR" dirty="0"/>
-              <a:t> Forest est un modèle asymétrique</a:t>
-            </a:r>
-          </a:p>
-          <a:p>
-            <a:pPr lvl="1"/>
-            <a:r>
-              <a:rPr lang="fr-FR" dirty="0"/>
-              <a:t>Apprentissage couteux</a:t>
-            </a:r>
-          </a:p>
-          <a:p>
-            <a:pPr lvl="1"/>
-            <a:r>
-              <a:rPr lang="fr-FR" dirty="0"/>
-              <a:t>Prédiction rapide</a:t>
-            </a:r>
-          </a:p>
-          <a:p>
-            <a:pPr lvl="1"/>
-            <a:r>
-              <a:rPr lang="fr-FR" dirty="0"/>
-              <a:t>Très utile</a:t>
-            </a:r>
-          </a:p>
-        </p:txBody>
-      </p:sp>
-    </p:spTree>
-    <p:extLst>
-      <p:ext uri="{BB962C8B-B14F-4D97-AF65-F5344CB8AC3E}">
-        <p14:creationId xmlns:p14="http://schemas.microsoft.com/office/powerpoint/2010/main" val="847402067"/>
-      </p:ext>
-    </p:extLst>
-  </p:cSld>
-  <p:clrMapOvr>
-    <a:masterClrMapping/>
-  </p:clrMapOvr>
-</p:sld>
-</file>
-
-<file path=ppt/slides/slide7.xml><?xml version="1.0" encoding="utf-8"?>
-<p:sld xmlns:a="http://schemas.openxmlformats.org/drawingml/2006/main" xmlns:r="http://schemas.openxmlformats.org/officeDocument/2006/relationships" xmlns:p="http://schemas.openxmlformats.org/presentationml/2006/main">
-  <p:cSld>
-    <p:spTree>
-      <p:nvGrpSpPr>
-        <p:cNvPr id="1" name=""/>
-        <p:cNvGrpSpPr/>
-        <p:nvPr/>
-      </p:nvGrpSpPr>
-      <p:grpSpPr>
-        <a:xfrm>
-          <a:off x="0" y="0"/>
-          <a:ext cx="0" cy="0"/>
-          <a:chOff x="0" y="0"/>
-          <a:chExt cx="0" cy="0"/>
-        </a:xfrm>
-      </p:grpSpPr>
-      <p:sp>
-        <p:nvSpPr>
-          <p:cNvPr id="2" name="Titre 1"/>
-          <p:cNvSpPr>
-            <a:spLocks noGrp="1"/>
-          </p:cNvSpPr>
-          <p:nvPr>
-            <p:ph type="title"/>
-          </p:nvPr>
-        </p:nvSpPr>
-        <p:spPr/>
-        <p:txBody>
-          <a:bodyPr/>
-          <a:lstStyle/>
-          <a:p>
-            <a:r>
-              <a:rPr lang="fr-FR" dirty="0" err="1"/>
-              <a:t>Random</a:t>
-            </a:r>
-            <a:r>
-              <a:rPr lang="fr-FR" dirty="0"/>
-              <a:t> Forest</a:t>
-            </a:r>
-          </a:p>
-        </p:txBody>
-      </p:sp>
-      <p:sp>
-        <p:nvSpPr>
-          <p:cNvPr id="3" name="Espace réservé du contenu 2"/>
-          <p:cNvSpPr>
-            <a:spLocks noGrp="1"/>
-          </p:cNvSpPr>
-          <p:nvPr>
-            <p:ph idx="1"/>
-          </p:nvPr>
-        </p:nvSpPr>
-        <p:spPr/>
-        <p:txBody>
-          <a:bodyPr/>
-          <a:lstStyle/>
-          <a:p>
-            <a:r>
               <a:rPr lang="fr-FR" dirty="0"/>
               <a:t>Exemple</a:t>
             </a:r>
@@ -6242,7 +5960,7 @@
 </p:sld>
 </file>
 
-<file path=ppt/slides/slide8.xml><?xml version="1.0" encoding="utf-8"?>
+<file path=ppt/slides/slide7.xml><?xml version="1.0" encoding="utf-8"?>
 <p:sld xmlns:a="http://schemas.openxmlformats.org/drawingml/2006/main" xmlns:r="http://schemas.openxmlformats.org/officeDocument/2006/relationships" xmlns:p="http://schemas.openxmlformats.org/presentationml/2006/main">
   <p:cSld>
     <p:spTree>
@@ -6354,6 +6072,125 @@
 </p:sld>
 </file>
 
+<file path=ppt/slides/slide8.xml><?xml version="1.0" encoding="utf-8"?>
+<p:sld xmlns:a="http://schemas.openxmlformats.org/drawingml/2006/main" xmlns:r="http://schemas.openxmlformats.org/officeDocument/2006/relationships" xmlns:p="http://schemas.openxmlformats.org/presentationml/2006/main">
+  <p:cSld>
+    <p:spTree>
+      <p:nvGrpSpPr>
+        <p:cNvPr id="1" name=""/>
+        <p:cNvGrpSpPr/>
+        <p:nvPr/>
+      </p:nvGrpSpPr>
+      <p:grpSpPr>
+        <a:xfrm>
+          <a:off x="0" y="0"/>
+          <a:ext cx="0" cy="0"/>
+          <a:chOff x="0" y="0"/>
+          <a:chExt cx="0" cy="0"/>
+        </a:xfrm>
+      </p:grpSpPr>
+      <p:sp>
+        <p:nvSpPr>
+          <p:cNvPr id="2" name="Titre 1"/>
+          <p:cNvSpPr>
+            <a:spLocks noGrp="1"/>
+          </p:cNvSpPr>
+          <p:nvPr>
+            <p:ph type="title"/>
+          </p:nvPr>
+        </p:nvSpPr>
+        <p:spPr/>
+        <p:txBody>
+          <a:bodyPr/>
+          <a:lstStyle/>
+          <a:p>
+            <a:r>
+              <a:rPr lang="fr-FR" dirty="0"/>
+              <a:t>Importances des </a:t>
+            </a:r>
+            <a:r>
+              <a:rPr lang="fr-FR" dirty="0" err="1"/>
+              <a:t>features</a:t>
+            </a:r>
+            <a:endParaRPr lang="fr-FR" dirty="0"/>
+          </a:p>
+        </p:txBody>
+      </p:sp>
+      <p:sp>
+        <p:nvSpPr>
+          <p:cNvPr id="3" name="Espace réservé du contenu 2"/>
+          <p:cNvSpPr>
+            <a:spLocks noGrp="1"/>
+          </p:cNvSpPr>
+          <p:nvPr>
+            <p:ph idx="1"/>
+          </p:nvPr>
+        </p:nvSpPr>
+        <p:spPr/>
+        <p:txBody>
+          <a:bodyPr/>
+          <a:lstStyle/>
+          <a:p>
+            <a:r>
+              <a:rPr lang="fr-FR" dirty="0"/>
+              <a:t>Les précédents algorithmes ne permettaient pas de connaître l'importance de chaque </a:t>
+            </a:r>
+            <a:r>
+              <a:rPr lang="fr-FR" dirty="0" err="1"/>
+              <a:t>feature</a:t>
+            </a:r>
+            <a:endParaRPr lang="fr-FR" dirty="0"/>
+          </a:p>
+          <a:p>
+            <a:r>
+              <a:rPr lang="fr-FR" dirty="0"/>
+              <a:t>Il est souvent utile de savoir les </a:t>
+            </a:r>
+            <a:r>
+              <a:rPr lang="fr-FR" dirty="0" err="1"/>
+              <a:t>features</a:t>
+            </a:r>
+            <a:r>
+              <a:rPr lang="fr-FR" dirty="0"/>
+              <a:t> prépondérantes</a:t>
+            </a:r>
+          </a:p>
+          <a:p>
+            <a:pPr lvl="1"/>
+            <a:r>
+              <a:rPr lang="fr-FR" dirty="0"/>
+              <a:t>Et l'inverse celle qui ne le sont pas</a:t>
+            </a:r>
+          </a:p>
+          <a:p>
+            <a:pPr lvl="1"/>
+            <a:r>
+              <a:rPr lang="fr-FR" dirty="0"/>
+              <a:t>Permet de faire baisser le nombre de dimension</a:t>
+            </a:r>
+          </a:p>
+          <a:p>
+            <a:pPr lvl="1"/>
+            <a:endParaRPr lang="fr-FR" dirty="0"/>
+          </a:p>
+          <a:p>
+            <a:endParaRPr lang="fr-FR" dirty="0"/>
+          </a:p>
+        </p:txBody>
+      </p:sp>
+    </p:spTree>
+    <p:extLst>
+      <p:ext uri="{BB962C8B-B14F-4D97-AF65-F5344CB8AC3E}">
+        <p14:creationId xmlns:p14="http://schemas.microsoft.com/office/powerpoint/2010/main" val="1701734456"/>
+      </p:ext>
+    </p:extLst>
+  </p:cSld>
+  <p:clrMapOvr>
+    <a:masterClrMapping/>
+  </p:clrMapOvr>
+</p:sld>
+</file>
+
 <file path=ppt/slides/slide9.xml><?xml version="1.0" encoding="utf-8"?>
 <p:sld xmlns:a="http://schemas.openxmlformats.org/drawingml/2006/main" xmlns:r="http://schemas.openxmlformats.org/officeDocument/2006/relationships" xmlns:p="http://schemas.openxmlformats.org/presentationml/2006/main">
   <p:cSld>
@@ -6388,11 +6225,11 @@
           <a:p>
             <a:r>
               <a:rPr lang="fr-FR" dirty="0"/>
-              <a:t>Importances des </a:t>
+              <a:t>Importance </a:t>
             </a:r>
             <a:r>
               <a:rPr lang="fr-FR" dirty="0" err="1"/>
-              <a:t>features</a:t>
+              <a:t>Feature</a:t>
             </a:r>
             <a:endParaRPr lang="fr-FR" dirty="0"/>
           </a:p>
@@ -6414,56 +6251,35 @@
           <a:lstStyle/>
           <a:p>
             <a:r>
-              <a:rPr lang="fr-FR" dirty="0"/>
-              <a:t>Les précédents algorithmes ne permettaient pas de connaître l'importance de chaque </a:t>
+              <a:rPr lang="fr-FR" dirty="0" err="1"/>
+              <a:t>forest.feature_importances</a:t>
+            </a:r>
+            <a:r>
+              <a:rPr lang="fr-FR" dirty="0"/>
+              <a:t>_</a:t>
+            </a:r>
+          </a:p>
+          <a:p>
+            <a:pPr lvl="1"/>
+            <a:r>
+              <a:rPr lang="fr-FR" dirty="0"/>
+              <a:t>Permet de donner pour chaque </a:t>
             </a:r>
             <a:r>
               <a:rPr lang="fr-FR" dirty="0" err="1"/>
               <a:t>feature</a:t>
             </a:r>
-            <a:endParaRPr lang="fr-FR" dirty="0"/>
-          </a:p>
-          <a:p>
-            <a:r>
-              <a:rPr lang="fr-FR" dirty="0"/>
-              <a:t>Il est souvent utile de savoir les </a:t>
-            </a:r>
-            <a:r>
-              <a:rPr lang="fr-FR" dirty="0" err="1"/>
-              <a:t>features</a:t>
-            </a:r>
-            <a:r>
-              <a:rPr lang="fr-FR" dirty="0"/>
-              <a:t> prépondérantes</a:t>
-            </a:r>
-          </a:p>
-          <a:p>
-            <a:pPr lvl="1"/>
-            <a:r>
-              <a:rPr lang="fr-FR" dirty="0"/>
-              <a:t>Et l'inverse celle qui ne le sont pas</a:t>
-            </a:r>
-          </a:p>
-          <a:p>
-            <a:pPr lvl="1"/>
-            <a:r>
-              <a:rPr lang="fr-FR" dirty="0"/>
-              <a:t>Permet de faire baisser le nombre de dimension</a:t>
-            </a:r>
-          </a:p>
-          <a:p>
-            <a:pPr lvl="1"/>
-            <a:endParaRPr lang="fr-FR" dirty="0"/>
-          </a:p>
-          <a:p>
-            <a:endParaRPr lang="fr-FR" dirty="0"/>
+            <a:r>
+              <a:rPr lang="fr-FR" dirty="0"/>
+              <a:t> son importance sur 1</a:t>
+            </a:r>
           </a:p>
         </p:txBody>
       </p:sp>
     </p:spTree>
     <p:extLst>
       <p:ext uri="{BB962C8B-B14F-4D97-AF65-F5344CB8AC3E}">
-        <p14:creationId xmlns:p14="http://schemas.microsoft.com/office/powerpoint/2010/main" val="1701734456"/>
+        <p14:creationId xmlns:p14="http://schemas.microsoft.com/office/powerpoint/2010/main" val="2784811699"/>
       </p:ext>
     </p:extLst>
   </p:cSld>

--- a/PPT/MachineLearning15-RandomForest.pptx
+++ b/PPT/MachineLearning15-RandomForest.pptx
@@ -5,10 +5,10 @@
     <p:sldMasterId id="2147483653" r:id="rId1"/>
   </p:sldMasterIdLst>
   <p:notesMasterIdLst>
-    <p:notesMasterId r:id="rId20"/>
+    <p:notesMasterId r:id="rId17"/>
   </p:notesMasterIdLst>
   <p:handoutMasterIdLst>
-    <p:handoutMasterId r:id="rId21"/>
+    <p:handoutMasterId r:id="rId18"/>
   </p:handoutMasterIdLst>
   <p:sldIdLst>
     <p:sldId id="264" r:id="rId2"/>
@@ -24,11 +24,8 @@
     <p:sldId id="283" r:id="rId12"/>
     <p:sldId id="284" r:id="rId13"/>
     <p:sldId id="300" r:id="rId14"/>
-    <p:sldId id="363" r:id="rId15"/>
-    <p:sldId id="364" r:id="rId16"/>
-    <p:sldId id="361" r:id="rId17"/>
-    <p:sldId id="365" r:id="rId18"/>
-    <p:sldId id="281" r:id="rId19"/>
+    <p:sldId id="361" r:id="rId15"/>
+    <p:sldId id="281" r:id="rId16"/>
   </p:sldIdLst>
   <p:sldSz cx="9144000" cy="6858000" type="screen4x3"/>
   <p:notesSz cx="6648450" cy="9782175"/>
@@ -4662,199 +4659,6 @@
           <p:cNvPr id="2" name="Titre 1">
             <a:extLst>
               <a:ext uri="{FF2B5EF4-FFF2-40B4-BE49-F238E27FC236}">
-                <a16:creationId xmlns:a16="http://schemas.microsoft.com/office/drawing/2014/main" id="{16BE6160-1AC7-15A9-2C10-F6BBF55891F3}"/>
-              </a:ext>
-            </a:extLst>
-          </p:cNvPr>
-          <p:cNvSpPr>
-            <a:spLocks noGrp="1"/>
-          </p:cNvSpPr>
-          <p:nvPr>
-            <p:ph type="title"/>
-          </p:nvPr>
-        </p:nvSpPr>
-        <p:spPr/>
-        <p:txBody>
-          <a:bodyPr/>
-          <a:lstStyle/>
-          <a:p>
-            <a:r>
-              <a:rPr lang="fr-FR" dirty="0"/>
-              <a:t>m2cgen</a:t>
-            </a:r>
-          </a:p>
-        </p:txBody>
-      </p:sp>
-      <p:sp>
-        <p:nvSpPr>
-          <p:cNvPr id="3" name="Espace réservé du contenu 2">
-            <a:extLst>
-              <a:ext uri="{FF2B5EF4-FFF2-40B4-BE49-F238E27FC236}">
-                <a16:creationId xmlns:a16="http://schemas.microsoft.com/office/drawing/2014/main" id="{234B632D-8290-F272-4AAC-BF13DBE616BD}"/>
-              </a:ext>
-            </a:extLst>
-          </p:cNvPr>
-          <p:cNvSpPr>
-            <a:spLocks noGrp="1"/>
-          </p:cNvSpPr>
-          <p:nvPr>
-            <p:ph idx="1"/>
-          </p:nvPr>
-        </p:nvSpPr>
-        <p:spPr/>
-        <p:txBody>
-          <a:bodyPr/>
-          <a:lstStyle/>
-          <a:p>
-            <a:r>
-              <a:rPr lang="fr-FR" dirty="0"/>
-              <a:t>Convertir le RF en code C directement</a:t>
-            </a:r>
-          </a:p>
-          <a:p>
-            <a:r>
-              <a:rPr lang="fr-FR" dirty="0"/>
-              <a:t>import m2cgen as m2c</a:t>
-            </a:r>
-          </a:p>
-          <a:p>
-            <a:r>
-              <a:rPr lang="fr-FR" dirty="0"/>
-              <a:t>c = m2c.export_to_c(model)</a:t>
-            </a:r>
-          </a:p>
-        </p:txBody>
-      </p:sp>
-    </p:spTree>
-    <p:extLst>
-      <p:ext uri="{BB962C8B-B14F-4D97-AF65-F5344CB8AC3E}">
-        <p14:creationId xmlns:p14="http://schemas.microsoft.com/office/powerpoint/2010/main" val="3257570496"/>
-      </p:ext>
-    </p:extLst>
-  </p:cSld>
-  <p:clrMapOvr>
-    <a:masterClrMapping/>
-  </p:clrMapOvr>
-</p:sld>
-</file>
-
-<file path=ppt/slides/slide15.xml><?xml version="1.0" encoding="utf-8"?>
-<p:sld xmlns:a="http://schemas.openxmlformats.org/drawingml/2006/main" xmlns:r="http://schemas.openxmlformats.org/officeDocument/2006/relationships" xmlns:p="http://schemas.openxmlformats.org/presentationml/2006/main">
-  <p:cSld>
-    <p:spTree>
-      <p:nvGrpSpPr>
-        <p:cNvPr id="1" name=""/>
-        <p:cNvGrpSpPr/>
-        <p:nvPr/>
-      </p:nvGrpSpPr>
-      <p:grpSpPr>
-        <a:xfrm>
-          <a:off x="0" y="0"/>
-          <a:ext cx="0" cy="0"/>
-          <a:chOff x="0" y="0"/>
-          <a:chExt cx="0" cy="0"/>
-        </a:xfrm>
-      </p:grpSpPr>
-      <p:sp>
-        <p:nvSpPr>
-          <p:cNvPr id="2" name="Titre 1">
-            <a:extLst>
-              <a:ext uri="{FF2B5EF4-FFF2-40B4-BE49-F238E27FC236}">
-                <a16:creationId xmlns:a16="http://schemas.microsoft.com/office/drawing/2014/main" id="{89E053F1-5B20-DA2D-1E88-3A281BA24375}"/>
-              </a:ext>
-            </a:extLst>
-          </p:cNvPr>
-          <p:cNvSpPr>
-            <a:spLocks noGrp="1"/>
-          </p:cNvSpPr>
-          <p:nvPr>
-            <p:ph type="title"/>
-          </p:nvPr>
-        </p:nvSpPr>
-        <p:spPr/>
-        <p:txBody>
-          <a:bodyPr/>
-          <a:lstStyle/>
-          <a:p>
-            <a:r>
-              <a:rPr lang="fr-FR" dirty="0" err="1"/>
-              <a:t>tree_lite</a:t>
-            </a:r>
-            <a:endParaRPr lang="fr-FR" dirty="0"/>
-          </a:p>
-        </p:txBody>
-      </p:sp>
-      <p:sp>
-        <p:nvSpPr>
-          <p:cNvPr id="3" name="Espace réservé du contenu 2">
-            <a:extLst>
-              <a:ext uri="{FF2B5EF4-FFF2-40B4-BE49-F238E27FC236}">
-                <a16:creationId xmlns:a16="http://schemas.microsoft.com/office/drawing/2014/main" id="{34F91FE2-FDDB-4CF6-7A13-3720BC8F9AAD}"/>
-              </a:ext>
-            </a:extLst>
-          </p:cNvPr>
-          <p:cNvSpPr>
-            <a:spLocks noGrp="1"/>
-          </p:cNvSpPr>
-          <p:nvPr>
-            <p:ph idx="1"/>
-          </p:nvPr>
-        </p:nvSpPr>
-        <p:spPr/>
-        <p:txBody>
-          <a:bodyPr/>
-          <a:lstStyle/>
-          <a:p>
-            <a:r>
-              <a:rPr lang="fr-FR" dirty="0"/>
-              <a:t>Exporte directement en un .</a:t>
-            </a:r>
-            <a:r>
-              <a:rPr lang="fr-FR" dirty="0" err="1"/>
-              <a:t>so</a:t>
-            </a:r>
-            <a:r>
-              <a:rPr lang="fr-FR" dirty="0"/>
-              <a:t> en C</a:t>
-            </a:r>
-          </a:p>
-        </p:txBody>
-      </p:sp>
-    </p:spTree>
-    <p:extLst>
-      <p:ext uri="{BB962C8B-B14F-4D97-AF65-F5344CB8AC3E}">
-        <p14:creationId xmlns:p14="http://schemas.microsoft.com/office/powerpoint/2010/main" val="122709446"/>
-      </p:ext>
-    </p:extLst>
-  </p:cSld>
-  <p:clrMapOvr>
-    <a:masterClrMapping/>
-  </p:clrMapOvr>
-</p:sld>
-</file>
-
-<file path=ppt/slides/slide16.xml><?xml version="1.0" encoding="utf-8"?>
-<p:sld xmlns:a="http://schemas.openxmlformats.org/drawingml/2006/main" xmlns:r="http://schemas.openxmlformats.org/officeDocument/2006/relationships" xmlns:p="http://schemas.openxmlformats.org/presentationml/2006/main">
-  <p:cSld>
-    <p:spTree>
-      <p:nvGrpSpPr>
-        <p:cNvPr id="1" name=""/>
-        <p:cNvGrpSpPr/>
-        <p:nvPr/>
-      </p:nvGrpSpPr>
-      <p:grpSpPr>
-        <a:xfrm>
-          <a:off x="0" y="0"/>
-          <a:ext cx="0" cy="0"/>
-          <a:chOff x="0" y="0"/>
-          <a:chExt cx="0" cy="0"/>
-        </a:xfrm>
-      </p:grpSpPr>
-      <p:sp>
-        <p:nvSpPr>
-          <p:cNvPr id="2" name="Titre 1">
-            <a:extLst>
-              <a:ext uri="{FF2B5EF4-FFF2-40B4-BE49-F238E27FC236}">
                 <a16:creationId xmlns:a16="http://schemas.microsoft.com/office/drawing/2014/main" id="{D9B0984B-C31F-4507-B93B-379E1A983053}"/>
               </a:ext>
             </a:extLst>
@@ -5169,99 +4973,7 @@
 </p:sld>
 </file>
 
-<file path=ppt/slides/slide17.xml><?xml version="1.0" encoding="utf-8"?>
-<p:sld xmlns:a="http://schemas.openxmlformats.org/drawingml/2006/main" xmlns:r="http://schemas.openxmlformats.org/officeDocument/2006/relationships" xmlns:p="http://schemas.openxmlformats.org/presentationml/2006/main">
-  <p:cSld>
-    <p:spTree>
-      <p:nvGrpSpPr>
-        <p:cNvPr id="1" name=""/>
-        <p:cNvGrpSpPr/>
-        <p:nvPr/>
-      </p:nvGrpSpPr>
-      <p:grpSpPr>
-        <a:xfrm>
-          <a:off x="0" y="0"/>
-          <a:ext cx="0" cy="0"/>
-          <a:chOff x="0" y="0"/>
-          <a:chExt cx="0" cy="0"/>
-        </a:xfrm>
-      </p:grpSpPr>
-      <p:sp>
-        <p:nvSpPr>
-          <p:cNvPr id="2" name="Titre 1">
-            <a:extLst>
-              <a:ext uri="{FF2B5EF4-FFF2-40B4-BE49-F238E27FC236}">
-                <a16:creationId xmlns:a16="http://schemas.microsoft.com/office/drawing/2014/main" id="{E64F5717-66AE-5089-200F-05C3F698E99A}"/>
-              </a:ext>
-            </a:extLst>
-          </p:cNvPr>
-          <p:cNvSpPr>
-            <a:spLocks noGrp="1"/>
-          </p:cNvSpPr>
-          <p:nvPr>
-            <p:ph type="title"/>
-          </p:nvPr>
-        </p:nvSpPr>
-        <p:spPr/>
-        <p:txBody>
-          <a:bodyPr/>
-          <a:lstStyle/>
-          <a:p>
-            <a:r>
-              <a:rPr lang="fr-FR" dirty="0"/>
-              <a:t>skl2onnx</a:t>
-            </a:r>
-          </a:p>
-        </p:txBody>
-      </p:sp>
-      <p:sp>
-        <p:nvSpPr>
-          <p:cNvPr id="3" name="Espace réservé du contenu 2">
-            <a:extLst>
-              <a:ext uri="{FF2B5EF4-FFF2-40B4-BE49-F238E27FC236}">
-                <a16:creationId xmlns:a16="http://schemas.microsoft.com/office/drawing/2014/main" id="{39C97779-0864-C42B-1D5A-B98E19839A12}"/>
-              </a:ext>
-            </a:extLst>
-          </p:cNvPr>
-          <p:cNvSpPr>
-            <a:spLocks noGrp="1"/>
-          </p:cNvSpPr>
-          <p:nvPr>
-            <p:ph idx="1"/>
-          </p:nvPr>
-        </p:nvSpPr>
-        <p:spPr/>
-        <p:txBody>
-          <a:bodyPr/>
-          <a:lstStyle/>
-          <a:p>
-            <a:r>
-              <a:rPr lang="fr-FR" dirty="0"/>
-              <a:t>Permet de convertir un modèle RF en ONNX</a:t>
-            </a:r>
-          </a:p>
-          <a:p>
-            <a:r>
-              <a:rPr lang="fr-FR" dirty="0"/>
-              <a:t>Puis en C</a:t>
-            </a:r>
-          </a:p>
-        </p:txBody>
-      </p:sp>
-    </p:spTree>
-    <p:extLst>
-      <p:ext uri="{BB962C8B-B14F-4D97-AF65-F5344CB8AC3E}">
-        <p14:creationId xmlns:p14="http://schemas.microsoft.com/office/powerpoint/2010/main" val="1807147850"/>
-      </p:ext>
-    </p:extLst>
-  </p:cSld>
-  <p:clrMapOvr>
-    <a:masterClrMapping/>
-  </p:clrMapOvr>
-</p:sld>
-</file>
-
-<file path=ppt/slides/slide18.xml><?xml version="1.0" encoding="utf-8"?>
+<file path=ppt/slides/slide15.xml><?xml version="1.0" encoding="utf-8"?>
 <p:sld xmlns:a="http://schemas.openxmlformats.org/drawingml/2006/main" xmlns:r="http://schemas.openxmlformats.org/officeDocument/2006/relationships" xmlns:p="http://schemas.openxmlformats.org/presentationml/2006/main">
   <p:cSld>
     <p:spTree>
